--- a/media/module7/slides.pptx
+++ b/media/module7/slides.pptx
@@ -34,6 +34,20 @@
     <p:sldId id="282" r:id="rId34"/>
     <p:sldId id="283" r:id="rId35"/>
     <p:sldId id="284" r:id="rId36"/>
+    <p:sldId id="285" r:id="rId37"/>
+    <p:sldId id="286" r:id="rId38"/>
+    <p:sldId id="287" r:id="rId39"/>
+    <p:sldId id="288" r:id="rId40"/>
+    <p:sldId id="289" r:id="rId41"/>
+    <p:sldId id="290" r:id="rId42"/>
+    <p:sldId id="291" r:id="rId43"/>
+    <p:sldId id="292" r:id="rId44"/>
+    <p:sldId id="293" r:id="rId45"/>
+    <p:sldId id="294" r:id="rId46"/>
+    <p:sldId id="295" r:id="rId47"/>
+    <p:sldId id="296" r:id="rId48"/>
+    <p:sldId id="297" r:id="rId49"/>
+    <p:sldId id="298" r:id="rId50"/>
   </p:sldIdLst>
   <p:sldSz cx="12191695" cy="6858000" type="screen4x3"/>
   <p:notesSz cx="6858000" cy="9144000"/>
@@ -600,7 +614,7 @@
           <a:lstStyle/>
           <a:p>
             <a:r>
-              <a:t>Run from course repository root.</a:t>
+              <a:t>From MODULE7 Verification &amp; Testing Methods.</a:t>
             </a:r>
           </a:p>
         </p:txBody>
@@ -670,7 +684,7 @@
           <a:lstStyle/>
           <a:p>
             <a:r>
-              <a:t>module7/examples/examples/i2c_baseline/README.md</a:t>
+              <a:t>From MODULE7 Topics Covered.</a:t>
             </a:r>
           </a:p>
         </p:txBody>
@@ -740,7 +754,497 @@
           <a:lstStyle/>
           <a:p>
             <a:r>
-              <a:t>Hands-on: module7/examples/examples/i2c_baseline/</a:t>
+              <a:t>From MODULE7 Topics Covered.</a:t>
+            </a:r>
+          </a:p>
+        </p:txBody>
+      </p:sp>
+      <p:sp>
+        <p:nvSpPr>
+          <p:cNvPr id="4" name="Slide Number Placeholder 3"/>
+          <p:cNvSpPr>
+            <a:spLocks noGrp="1"/>
+          </p:cNvSpPr>
+          <p:nvPr>
+            <p:ph type="sldNum" idx="5" sz="quarter"/>
+          </p:nvPr>
+        </p:nvSpPr>
+        <p:spPr/>
+      </p:sp>
+    </p:spTree>
+  </p:cSld>
+  <p:clrMapOvr>
+    <a:masterClrMapping/>
+  </p:clrMapOvr>
+</p:notes>
+</file>
+
+<file path=ppt/notesSlides/notesSlide13.xml><?xml version="1.0" encoding="utf-8"?>
+<p:notes xmlns:a="http://schemas.openxmlformats.org/drawingml/2006/main" xmlns:p="http://schemas.openxmlformats.org/presentationml/2006/main" xmlns:r="http://schemas.openxmlformats.org/officeDocument/2006/relationships">
+  <p:cSld>
+    <p:spTree>
+      <p:nvGrpSpPr>
+        <p:cNvPr id="1" name=""/>
+        <p:cNvGrpSpPr/>
+        <p:nvPr/>
+      </p:nvGrpSpPr>
+      <p:grpSpPr>
+        <a:xfrm>
+          <a:off x="0" y="0"/>
+          <a:ext cx="0" cy="0"/>
+          <a:chOff x="0" y="0"/>
+          <a:chExt cx="0" cy="0"/>
+        </a:xfrm>
+      </p:grpSpPr>
+      <p:sp>
+        <p:nvSpPr>
+          <p:cNvPr id="2" name="Slide Image Placeholder 1"/>
+          <p:cNvSpPr>
+            <a:spLocks noGrp="1"/>
+          </p:cNvSpPr>
+          <p:nvPr>
+            <p:ph type="sldImg" idx="2"/>
+          </p:nvPr>
+        </p:nvSpPr>
+        <p:spPr/>
+      </p:sp>
+      <p:sp>
+        <p:nvSpPr>
+          <p:cNvPr id="3" name="Notes Placeholder 2"/>
+          <p:cNvSpPr>
+            <a:spLocks noGrp="1"/>
+          </p:cNvSpPr>
+          <p:nvPr>
+            <p:ph type="body" idx="3" sz="quarter"/>
+          </p:nvPr>
+        </p:nvSpPr>
+        <p:spPr/>
+        <p:txBody>
+          <a:bodyPr/>
+          <a:lstStyle/>
+          <a:p>
+            <a:r>
+              <a:t>Run from course repository root.</a:t>
+            </a:r>
+          </a:p>
+        </p:txBody>
+      </p:sp>
+      <p:sp>
+        <p:nvSpPr>
+          <p:cNvPr id="4" name="Slide Number Placeholder 3"/>
+          <p:cNvSpPr>
+            <a:spLocks noGrp="1"/>
+          </p:cNvSpPr>
+          <p:nvPr>
+            <p:ph type="sldNum" idx="5" sz="quarter"/>
+          </p:nvPr>
+        </p:nvSpPr>
+        <p:spPr/>
+      </p:sp>
+    </p:spTree>
+  </p:cSld>
+  <p:clrMapOvr>
+    <a:masterClrMapping/>
+  </p:clrMapOvr>
+</p:notes>
+</file>
+
+<file path=ppt/notesSlides/notesSlide14.xml><?xml version="1.0" encoding="utf-8"?>
+<p:notes xmlns:a="http://schemas.openxmlformats.org/drawingml/2006/main" xmlns:p="http://schemas.openxmlformats.org/presentationml/2006/main" xmlns:r="http://schemas.openxmlformats.org/officeDocument/2006/relationships">
+  <p:cSld>
+    <p:spTree>
+      <p:nvGrpSpPr>
+        <p:cNvPr id="1" name=""/>
+        <p:cNvGrpSpPr/>
+        <p:nvPr/>
+      </p:nvGrpSpPr>
+      <p:grpSpPr>
+        <a:xfrm>
+          <a:off x="0" y="0"/>
+          <a:ext cx="0" cy="0"/>
+          <a:chOff x="0" y="0"/>
+          <a:chExt cx="0" cy="0"/>
+        </a:xfrm>
+      </p:grpSpPr>
+      <p:sp>
+        <p:nvSpPr>
+          <p:cNvPr id="2" name="Slide Image Placeholder 1"/>
+          <p:cNvSpPr>
+            <a:spLocks noGrp="1"/>
+          </p:cNvSpPr>
+          <p:nvPr>
+            <p:ph type="sldImg" idx="2"/>
+          </p:nvPr>
+        </p:nvSpPr>
+        <p:spPr/>
+      </p:sp>
+      <p:sp>
+        <p:nvSpPr>
+          <p:cNvPr id="3" name="Notes Placeholder 2"/>
+          <p:cNvSpPr>
+            <a:spLocks noGrp="1"/>
+          </p:cNvSpPr>
+          <p:nvPr>
+            <p:ph type="body" idx="3" sz="quarter"/>
+          </p:nvPr>
+        </p:nvSpPr>
+        <p:spPr/>
+        <p:txBody>
+          <a:bodyPr/>
+          <a:lstStyle/>
+          <a:p>
+            <a:r>
+              <a:t>module7/examples/i2c_baseline/README.md</a:t>
+            </a:r>
+          </a:p>
+        </p:txBody>
+      </p:sp>
+      <p:sp>
+        <p:nvSpPr>
+          <p:cNvPr id="4" name="Slide Number Placeholder 3"/>
+          <p:cNvSpPr>
+            <a:spLocks noGrp="1"/>
+          </p:cNvSpPr>
+          <p:nvPr>
+            <p:ph type="sldNum" idx="5" sz="quarter"/>
+          </p:nvPr>
+        </p:nvSpPr>
+        <p:spPr/>
+      </p:sp>
+    </p:spTree>
+  </p:cSld>
+  <p:clrMapOvr>
+    <a:masterClrMapping/>
+  </p:clrMapOvr>
+</p:notes>
+</file>
+
+<file path=ppt/notesSlides/notesSlide15.xml><?xml version="1.0" encoding="utf-8"?>
+<p:notes xmlns:a="http://schemas.openxmlformats.org/drawingml/2006/main" xmlns:p="http://schemas.openxmlformats.org/presentationml/2006/main" xmlns:r="http://schemas.openxmlformats.org/officeDocument/2006/relationships">
+  <p:cSld>
+    <p:spTree>
+      <p:nvGrpSpPr>
+        <p:cNvPr id="1" name=""/>
+        <p:cNvGrpSpPr/>
+        <p:nvPr/>
+      </p:nvGrpSpPr>
+      <p:grpSpPr>
+        <a:xfrm>
+          <a:off x="0" y="0"/>
+          <a:ext cx="0" cy="0"/>
+          <a:chOff x="0" y="0"/>
+          <a:chExt cx="0" cy="0"/>
+        </a:xfrm>
+      </p:grpSpPr>
+      <p:sp>
+        <p:nvSpPr>
+          <p:cNvPr id="2" name="Slide Image Placeholder 1"/>
+          <p:cNvSpPr>
+            <a:spLocks noGrp="1"/>
+          </p:cNvSpPr>
+          <p:nvPr>
+            <p:ph type="sldImg" idx="2"/>
+          </p:nvPr>
+        </p:nvSpPr>
+        <p:spPr/>
+      </p:sp>
+      <p:sp>
+        <p:nvSpPr>
+          <p:cNvPr id="3" name="Notes Placeholder 2"/>
+          <p:cNvSpPr>
+            <a:spLocks noGrp="1"/>
+          </p:cNvSpPr>
+          <p:nvPr>
+            <p:ph type="body" idx="3" sz="quarter"/>
+          </p:nvPr>
+        </p:nvSpPr>
+        <p:spPr/>
+        <p:txBody>
+          <a:bodyPr/>
+          <a:lstStyle/>
+          <a:p>
+            <a:r>
+              <a:t>Hands-on: module7/examples/i2c_baseline/</a:t>
+            </a:r>
+          </a:p>
+        </p:txBody>
+      </p:sp>
+      <p:sp>
+        <p:nvSpPr>
+          <p:cNvPr id="4" name="Slide Number Placeholder 3"/>
+          <p:cNvSpPr>
+            <a:spLocks noGrp="1"/>
+          </p:cNvSpPr>
+          <p:nvPr>
+            <p:ph type="sldNum" idx="5" sz="quarter"/>
+          </p:nvPr>
+        </p:nvSpPr>
+        <p:spPr/>
+      </p:sp>
+    </p:spTree>
+  </p:cSld>
+  <p:clrMapOvr>
+    <a:masterClrMapping/>
+  </p:clrMapOvr>
+</p:notes>
+</file>
+
+<file path=ppt/notesSlides/notesSlide16.xml><?xml version="1.0" encoding="utf-8"?>
+<p:notes xmlns:a="http://schemas.openxmlformats.org/drawingml/2006/main" xmlns:p="http://schemas.openxmlformats.org/presentationml/2006/main" xmlns:r="http://schemas.openxmlformats.org/officeDocument/2006/relationships">
+  <p:cSld>
+    <p:spTree>
+      <p:nvGrpSpPr>
+        <p:cNvPr id="1" name=""/>
+        <p:cNvGrpSpPr/>
+        <p:nvPr/>
+      </p:nvGrpSpPr>
+      <p:grpSpPr>
+        <a:xfrm>
+          <a:off x="0" y="0"/>
+          <a:ext cx="0" cy="0"/>
+          <a:chOff x="0" y="0"/>
+          <a:chExt cx="0" cy="0"/>
+        </a:xfrm>
+      </p:grpSpPr>
+      <p:sp>
+        <p:nvSpPr>
+          <p:cNvPr id="2" name="Slide Image Placeholder 1"/>
+          <p:cNvSpPr>
+            <a:spLocks noGrp="1"/>
+          </p:cNvSpPr>
+          <p:nvPr>
+            <p:ph type="sldImg" idx="2"/>
+          </p:nvPr>
+        </p:nvSpPr>
+        <p:spPr/>
+      </p:sp>
+      <p:sp>
+        <p:nvSpPr>
+          <p:cNvPr id="3" name="Notes Placeholder 2"/>
+          <p:cNvSpPr>
+            <a:spLocks noGrp="1"/>
+          </p:cNvSpPr>
+          <p:nvPr>
+            <p:ph type="body" idx="3" sz="quarter"/>
+          </p:nvPr>
+        </p:nvSpPr>
+        <p:spPr/>
+        <p:txBody>
+          <a:bodyPr/>
+          <a:lstStyle/>
+          <a:p>
+            <a:r>
+              <a:t>From MODULE7 Key Concepts.</a:t>
+            </a:r>
+          </a:p>
+        </p:txBody>
+      </p:sp>
+      <p:sp>
+        <p:nvSpPr>
+          <p:cNvPr id="4" name="Slide Number Placeholder 3"/>
+          <p:cNvSpPr>
+            <a:spLocks noGrp="1"/>
+          </p:cNvSpPr>
+          <p:nvPr>
+            <p:ph type="sldNum" idx="5" sz="quarter"/>
+          </p:nvPr>
+        </p:nvSpPr>
+        <p:spPr/>
+      </p:sp>
+    </p:spTree>
+  </p:cSld>
+  <p:clrMapOvr>
+    <a:masterClrMapping/>
+  </p:clrMapOvr>
+</p:notes>
+</file>
+
+<file path=ppt/notesSlides/notesSlide17.xml><?xml version="1.0" encoding="utf-8"?>
+<p:notes xmlns:a="http://schemas.openxmlformats.org/drawingml/2006/main" xmlns:p="http://schemas.openxmlformats.org/presentationml/2006/main" xmlns:r="http://schemas.openxmlformats.org/officeDocument/2006/relationships">
+  <p:cSld>
+    <p:spTree>
+      <p:nvGrpSpPr>
+        <p:cNvPr id="1" name=""/>
+        <p:cNvGrpSpPr/>
+        <p:nvPr/>
+      </p:nvGrpSpPr>
+      <p:grpSpPr>
+        <a:xfrm>
+          <a:off x="0" y="0"/>
+          <a:ext cx="0" cy="0"/>
+          <a:chOff x="0" y="0"/>
+          <a:chExt cx="0" cy="0"/>
+        </a:xfrm>
+      </p:grpSpPr>
+      <p:sp>
+        <p:nvSpPr>
+          <p:cNvPr id="2" name="Slide Image Placeholder 1"/>
+          <p:cNvSpPr>
+            <a:spLocks noGrp="1"/>
+          </p:cNvSpPr>
+          <p:nvPr>
+            <p:ph type="sldImg" idx="2"/>
+          </p:nvPr>
+        </p:nvSpPr>
+        <p:spPr/>
+      </p:sp>
+      <p:sp>
+        <p:nvSpPr>
+          <p:cNvPr id="3" name="Notes Placeholder 2"/>
+          <p:cNvSpPr>
+            <a:spLocks noGrp="1"/>
+          </p:cNvSpPr>
+          <p:nvPr>
+            <p:ph type="body" idx="3" sz="quarter"/>
+          </p:nvPr>
+        </p:nvSpPr>
+        <p:spPr/>
+        <p:txBody>
+          <a:bodyPr/>
+          <a:lstStyle/>
+          <a:p>
+            <a:r>
+              <a:t>From MODULE7 Key Concepts.</a:t>
+            </a:r>
+          </a:p>
+        </p:txBody>
+      </p:sp>
+      <p:sp>
+        <p:nvSpPr>
+          <p:cNvPr id="4" name="Slide Number Placeholder 3"/>
+          <p:cNvSpPr>
+            <a:spLocks noGrp="1"/>
+          </p:cNvSpPr>
+          <p:nvPr>
+            <p:ph type="sldNum" idx="5" sz="quarter"/>
+          </p:nvPr>
+        </p:nvSpPr>
+        <p:spPr/>
+      </p:sp>
+    </p:spTree>
+  </p:cSld>
+  <p:clrMapOvr>
+    <a:masterClrMapping/>
+  </p:clrMapOvr>
+</p:notes>
+</file>
+
+<file path=ppt/notesSlides/notesSlide18.xml><?xml version="1.0" encoding="utf-8"?>
+<p:notes xmlns:a="http://schemas.openxmlformats.org/drawingml/2006/main" xmlns:p="http://schemas.openxmlformats.org/presentationml/2006/main" xmlns:r="http://schemas.openxmlformats.org/officeDocument/2006/relationships">
+  <p:cSld>
+    <p:spTree>
+      <p:nvGrpSpPr>
+        <p:cNvPr id="1" name=""/>
+        <p:cNvGrpSpPr/>
+        <p:nvPr/>
+      </p:nvGrpSpPr>
+      <p:grpSpPr>
+        <a:xfrm>
+          <a:off x="0" y="0"/>
+          <a:ext cx="0" cy="0"/>
+          <a:chOff x="0" y="0"/>
+          <a:chExt cx="0" cy="0"/>
+        </a:xfrm>
+      </p:grpSpPr>
+      <p:sp>
+        <p:nvSpPr>
+          <p:cNvPr id="2" name="Slide Image Placeholder 1"/>
+          <p:cNvSpPr>
+            <a:spLocks noGrp="1"/>
+          </p:cNvSpPr>
+          <p:nvPr>
+            <p:ph type="sldImg" idx="2"/>
+          </p:nvPr>
+        </p:nvSpPr>
+        <p:spPr/>
+      </p:sp>
+      <p:sp>
+        <p:nvSpPr>
+          <p:cNvPr id="3" name="Notes Placeholder 2"/>
+          <p:cNvSpPr>
+            <a:spLocks noGrp="1"/>
+          </p:cNvSpPr>
+          <p:nvPr>
+            <p:ph type="body" idx="3" sz="quarter"/>
+          </p:nvPr>
+        </p:nvSpPr>
+        <p:spPr/>
+        <p:txBody>
+          <a:bodyPr/>
+          <a:lstStyle/>
+          <a:p>
+            <a:r>
+              <a:t>From MODULE7 Common Pitfalls.</a:t>
+            </a:r>
+          </a:p>
+        </p:txBody>
+      </p:sp>
+      <p:sp>
+        <p:nvSpPr>
+          <p:cNvPr id="4" name="Slide Number Placeholder 3"/>
+          <p:cNvSpPr>
+            <a:spLocks noGrp="1"/>
+          </p:cNvSpPr>
+          <p:nvPr>
+            <p:ph type="sldNum" idx="5" sz="quarter"/>
+          </p:nvPr>
+        </p:nvSpPr>
+        <p:spPr/>
+      </p:sp>
+    </p:spTree>
+  </p:cSld>
+  <p:clrMapOvr>
+    <a:masterClrMapping/>
+  </p:clrMapOvr>
+</p:notes>
+</file>
+
+<file path=ppt/notesSlides/notesSlide19.xml><?xml version="1.0" encoding="utf-8"?>
+<p:notes xmlns:a="http://schemas.openxmlformats.org/drawingml/2006/main" xmlns:p="http://schemas.openxmlformats.org/presentationml/2006/main" xmlns:r="http://schemas.openxmlformats.org/officeDocument/2006/relationships">
+  <p:cSld>
+    <p:spTree>
+      <p:nvGrpSpPr>
+        <p:cNvPr id="1" name=""/>
+        <p:cNvGrpSpPr/>
+        <p:nvPr/>
+      </p:nvGrpSpPr>
+      <p:grpSpPr>
+        <a:xfrm>
+          <a:off x="0" y="0"/>
+          <a:ext cx="0" cy="0"/>
+          <a:chOff x="0" y="0"/>
+          <a:chExt cx="0" cy="0"/>
+        </a:xfrm>
+      </p:grpSpPr>
+      <p:sp>
+        <p:nvSpPr>
+          <p:cNvPr id="2" name="Slide Image Placeholder 1"/>
+          <p:cNvSpPr>
+            <a:spLocks noGrp="1"/>
+          </p:cNvSpPr>
+          <p:nvPr>
+            <p:ph type="sldImg" idx="2"/>
+          </p:nvPr>
+        </p:nvSpPr>
+        <p:spPr/>
+      </p:sp>
+      <p:sp>
+        <p:nvSpPr>
+          <p:cNvPr id="3" name="Notes Placeholder 2"/>
+          <p:cNvSpPr>
+            <a:spLocks noGrp="1"/>
+          </p:cNvSpPr>
+          <p:nvPr>
+            <p:ph type="body" idx="3" sz="quarter"/>
+          </p:nvPr>
+        </p:nvSpPr>
+        <p:spPr/>
+        <p:txBody>
+          <a:bodyPr/>
+          <a:lstStyle/>
+          <a:p>
+            <a:r>
+              <a:t>From MODULE7 Common Pitfalls.</a:t>
             </a:r>
           </a:p>
         </p:txBody>
@@ -1020,7 +1524,7 @@
           <a:lstStyle/>
           <a:p>
             <a:r>
-              <a:t>From MODULE7 Verification &amp; Testing Methods.</a:t>
+              <a:t>From MODULE7 — execution and artifact layout.</a:t>
             </a:r>
           </a:p>
         </p:txBody>
@@ -1090,7 +1594,7 @@
           <a:lstStyle/>
           <a:p>
             <a:r>
-              <a:t>From MODULE7 Verification &amp; Testing Methods.</a:t>
+              <a:t>Match each path to files under module/examples/.</a:t>
             </a:r>
           </a:p>
         </p:txBody>
@@ -1160,7 +1664,7 @@
           <a:lstStyle/>
           <a:p>
             <a:r>
-              <a:t>From MODULE7 Verification &amp; Testing Methods.</a:t>
+              <a:t>Trace while running module7/EXAMPLES.md labs.</a:t>
             </a:r>
           </a:p>
         </p:txBody>
@@ -1230,7 +1734,7 @@
           <a:lstStyle/>
           <a:p>
             <a:r>
-              <a:t>From MODULE7 Topics Covered.</a:t>
+              <a:t>From MODULE7 Verification &amp; Testing Methods.</a:t>
             </a:r>
           </a:p>
         </p:txBody>
@@ -1300,7 +1804,7 @@
           <a:lstStyle/>
           <a:p>
             <a:r>
-              <a:t>From MODULE7 Topics Covered.</a:t>
+              <a:t>From MODULE7 Verification &amp; Testing Methods.</a:t>
             </a:r>
           </a:p>
         </p:txBody>
@@ -4458,14 +4962,132 @@
               </a:defRPr>
             </a:pPr>
             <a:r>
-              <a:t>Verification environment architecture</a:t>
+              <a:t>2. I²C master FSM</a:t>
+            </a:r>
+          </a:p>
+        </p:txBody>
+      </p:sp>
+      <p:sp>
+        <p:nvSpPr>
+          <p:cNvPr id="3" name="TextBox 2"/>
+          <p:cNvSpPr txBox="1"/>
+          <p:nvPr/>
+        </p:nvSpPr>
+        <p:spPr>
+          <a:xfrm>
+            <a:off x="548640" y="1234440"/>
+            <a:ext cx="5303520" cy="4754880"/>
+          </a:xfrm>
+          <a:prstGeom prst="rect">
+            <a:avLst/>
+          </a:prstGeom>
+          <a:noFill/>
+        </p:spPr>
+        <p:txBody>
+          <a:bodyPr wrap="square">
+            <a:noAutofit/>
+          </a:bodyPr>
+          <a:lstStyle/>
+          <a:p>
+            <a:pPr>
+              <a:lnSpc>
+                <a:spcPts val="2200"/>
+              </a:lnSpc>
+              <a:spcAft>
+                <a:spcPts val="1000"/>
+              </a:spcAft>
+              <a:defRPr sz="2000" b="0">
+                <a:solidFill>
+                  <a:srgbClr val="333333"/>
+                </a:solidFill>
+                <a:latin typeface="Calibri"/>
+              </a:defRPr>
+            </a:pPr>
+            <a:r>
+              <a:t>• States: IDLE → START → ADDR_BITS</a:t>
+            </a:r>
+          </a:p>
+          <a:p>
+            <a:pPr>
+              <a:lnSpc>
+                <a:spcPts val="2200"/>
+              </a:lnSpc>
+              <a:spcAft>
+                <a:spcPts val="1000"/>
+              </a:spcAft>
+              <a:defRPr sz="2000" b="0">
+                <a:solidFill>
+                  <a:srgbClr val="333333"/>
+                </a:solidFill>
+                <a:latin typeface="Calibri"/>
+              </a:defRPr>
+            </a:pPr>
+            <a:r>
+              <a:t>      → DATA_BITS → STOP.</a:t>
+            </a:r>
+          </a:p>
+          <a:p>
+            <a:pPr>
+              <a:lnSpc>
+                <a:spcPts val="2200"/>
+              </a:lnSpc>
+              <a:spcAft>
+                <a:spcPts val="1000"/>
+              </a:spcAft>
+              <a:defRPr sz="2000" b="0">
+                <a:solidFill>
+                  <a:srgbClr val="333333"/>
+                </a:solidFill>
+                <a:latin typeface="Calibri"/>
+              </a:defRPr>
+            </a:pPr>
+            <a:r>
+              <a:t>• One teaching write: 7-bit `addr`</a:t>
+            </a:r>
+          </a:p>
+          <a:p>
+            <a:pPr>
+              <a:lnSpc>
+                <a:spcPts val="2200"/>
+              </a:lnSpc>
+              <a:spcAft>
+                <a:spcPts val="1000"/>
+              </a:spcAft>
+              <a:defRPr sz="2000" b="0">
+                <a:solidFill>
+                  <a:srgbClr val="333333"/>
+                </a:solidFill>
+                <a:latin typeface="Calibri"/>
+              </a:defRPr>
+            </a:pPr>
+            <a:r>
+              <a:t>      + data byte on `scl`/`sda`</a:t>
+            </a:r>
+          </a:p>
+          <a:p>
+            <a:pPr>
+              <a:lnSpc>
+                <a:spcPts val="2200"/>
+              </a:lnSpc>
+              <a:spcAft>
+                <a:spcPts val="1000"/>
+              </a:spcAft>
+              <a:defRPr sz="2000" b="0">
+                <a:solidFill>
+                  <a:srgbClr val="333333"/>
+                </a:solidFill>
+                <a:latin typeface="Calibri"/>
+              </a:defRPr>
+            </a:pPr>
+            <a:r>
+              <a:t>      (push-pull model).</a:t>
             </a:r>
           </a:p>
         </p:txBody>
       </p:sp>
       <p:pic>
         <p:nvPicPr>
-          <p:cNvPr id="3" name="Picture 2" descr="verification_architecture.png"/>
+          <p:cNvPr id="4" name="Picture 3" descr="verification_architecture.png"/>
           <p:cNvPicPr>
             <a:picLocks noChangeAspect="1"/>
           </p:cNvPicPr>
@@ -4479,53 +5101,14 @@
         </p:blipFill>
         <p:spPr>
           <a:xfrm>
-            <a:off x="548640" y="1143000"/>
-            <a:ext cx="8128000" cy="4572000"/>
+            <a:off x="6172200" y="2094547"/>
+            <a:ext cx="5394960" cy="3034665"/>
           </a:xfrm>
           <a:prstGeom prst="rect">
             <a:avLst/>
           </a:prstGeom>
         </p:spPr>
       </p:pic>
-      <p:sp>
-        <p:nvSpPr>
-          <p:cNvPr id="4" name="TextBox 3"/>
-          <p:cNvSpPr txBox="1"/>
-          <p:nvPr/>
-        </p:nvSpPr>
-        <p:spPr>
-          <a:xfrm>
-            <a:off x="548640" y="5897880"/>
-            <a:ext cx="11064240" cy="411480"/>
-          </a:xfrm>
-          <a:prstGeom prst="rect">
-            <a:avLst/>
-          </a:prstGeom>
-          <a:noFill/>
-        </p:spPr>
-        <p:txBody>
-          <a:bodyPr wrap="square">
-            <a:noAutofit/>
-          </a:bodyPr>
-          <a:lstStyle/>
-          <a:p>
-            <a:pPr>
-              <a:lnSpc>
-                <a:spcPts val="2200"/>
-              </a:lnSpc>
-              <a:defRPr sz="1200" b="0">
-                <a:solidFill>
-                  <a:srgbClr val="333333"/>
-                </a:solidFill>
-                <a:latin typeface="Calibri"/>
-              </a:defRPr>
-            </a:pPr>
-            <a:r>
-              <a:t>Module 7: UVM layers, agents, and checkers for this phase.</a:t>
-            </a:r>
-          </a:p>
-        </p:txBody>
-      </p:sp>
       <p:sp>
         <p:nvSpPr>
           <p:cNvPr id="5" name="TextBox 4"/>
@@ -4617,7 +5200,7 @@
               </a:defRPr>
             </a:pPr>
             <a:r>
-              <a:t>1. Block hierarchy</a:t>
+              <a:t>3. Teaching vs real I²C</a:t>
             </a:r>
           </a:p>
         </p:txBody>
@@ -4631,7 +5214,7 @@
         <p:spPr>
           <a:xfrm>
             <a:off x="548640" y="1234440"/>
-            <a:ext cx="11064240" cy="4937760"/>
+            <a:ext cx="5303520" cy="4754880"/>
           </a:xfrm>
           <a:prstGeom prst="rect">
             <a:avLst/>
@@ -4659,7 +5242,7 @@
               </a:defRPr>
             </a:pPr>
             <a:r>
-              <a:t>• top_i2c_baseline → `clk_div` + `i2c_master`; C++</a:t>
+              <a:t>• No open-drain, ACK/NACK, or</a:t>
             </a:r>
           </a:p>
           <a:p>
@@ -4678,14 +5261,57 @@
               </a:defRPr>
             </a:pPr>
             <a:r>
-              <a:t>      drives `clk`/`rst_n`.</a:t>
-            </a:r>
-          </a:p>
-        </p:txBody>
-      </p:sp>
-      <p:sp>
-        <p:nvSpPr>
-          <p:cNvPr id="4" name="TextBox 3"/>
+              <a:t>      arbitration in baseline — learn</a:t>
+            </a:r>
+          </a:p>
+          <a:p>
+            <a:pPr>
+              <a:lnSpc>
+                <a:spcPts val="2200"/>
+              </a:lnSpc>
+              <a:spcAft>
+                <a:spcPts val="1000"/>
+              </a:spcAft>
+              <a:defRPr sz="2000" b="0">
+                <a:solidFill>
+                  <a:srgbClr val="333333"/>
+                </a:solidFill>
+                <a:latin typeface="Calibri"/>
+              </a:defRPr>
+            </a:pPr>
+            <a:r>
+              <a:t>      sequencing first.</a:t>
+            </a:r>
+          </a:p>
+        </p:txBody>
+      </p:sp>
+      <p:pic>
+        <p:nvPicPr>
+          <p:cNvPr id="4" name="Picture 3" descr="testing_methods.png"/>
+          <p:cNvPicPr>
+            <a:picLocks noChangeAspect="1"/>
+          </p:cNvPicPr>
+          <p:nvPr/>
+        </p:nvPicPr>
+        <p:blipFill>
+          <a:blip r:embed="rId2"/>
+          <a:stretch>
+            <a:fillRect/>
+          </a:stretch>
+        </p:blipFill>
+        <p:spPr>
+          <a:xfrm>
+            <a:off x="6172200" y="2094547"/>
+            <a:ext cx="5394960" cy="3034665"/>
+          </a:xfrm>
+          <a:prstGeom prst="rect">
+            <a:avLst/>
+          </a:prstGeom>
+        </p:spPr>
+      </p:pic>
+      <p:sp>
+        <p:nvSpPr>
+          <p:cNvPr id="5" name="TextBox 4"/>
           <p:cNvSpPr txBox="1"/>
           <p:nvPr/>
         </p:nvSpPr>
@@ -4774,21 +5400,45 @@
               </a:defRPr>
             </a:pPr>
             <a:r>
-              <a:t>2. I²C master FSM</a:t>
-            </a:r>
-          </a:p>
-        </p:txBody>
-      </p:sp>
-      <p:sp>
-        <p:nvSpPr>
-          <p:cNvPr id="3" name="TextBox 2"/>
+              <a:t>RTL block diagram (reference)</a:t>
+            </a:r>
+          </a:p>
+        </p:txBody>
+      </p:sp>
+      <p:pic>
+        <p:nvPicPr>
+          <p:cNvPr id="3" name="Picture 2" descr="rtl_architecture.png"/>
+          <p:cNvPicPr>
+            <a:picLocks noChangeAspect="1"/>
+          </p:cNvPicPr>
+          <p:nvPr/>
+        </p:nvPicPr>
+        <p:blipFill>
+          <a:blip r:embed="rId2"/>
+          <a:stretch>
+            <a:fillRect/>
+          </a:stretch>
+        </p:blipFill>
+        <p:spPr>
+          <a:xfrm>
+            <a:off x="548640" y="1143000"/>
+            <a:ext cx="8128000" cy="4572000"/>
+          </a:xfrm>
+          <a:prstGeom prst="rect">
+            <a:avLst/>
+          </a:prstGeom>
+        </p:spPr>
+      </p:pic>
+      <p:sp>
+        <p:nvSpPr>
+          <p:cNvPr id="4" name="TextBox 3"/>
           <p:cNvSpPr txBox="1"/>
           <p:nvPr/>
         </p:nvSpPr>
         <p:spPr>
           <a:xfrm>
-            <a:off x="548640" y="1234440"/>
-            <a:ext cx="11064240" cy="4937760"/>
+            <a:off x="548640" y="5897880"/>
+            <a:ext cx="11064240" cy="411480"/>
           </a:xfrm>
           <a:prstGeom prst="rect">
             <a:avLst/>
@@ -4805,63 +5455,22 @@
               <a:lnSpc>
                 <a:spcPts val="2200"/>
               </a:lnSpc>
-              <a:spcAft>
-                <a:spcPts val="1000"/>
-              </a:spcAft>
-              <a:defRPr sz="2000" b="0">
-                <a:solidFill>
-                  <a:srgbClr val="333333"/>
-                </a:solidFill>
-                <a:latin typeface="Calibri"/>
-              </a:defRPr>
-            </a:pPr>
-            <a:r>
-              <a:t>• States: IDLE → START → ADDR_BITS → DATA_BITS → STOP.</a:t>
-            </a:r>
-          </a:p>
-          <a:p>
-            <a:pPr>
-              <a:lnSpc>
-                <a:spcPts val="2200"/>
-              </a:lnSpc>
-              <a:spcAft>
-                <a:spcPts val="1000"/>
-              </a:spcAft>
-              <a:defRPr sz="2000" b="0">
-                <a:solidFill>
-                  <a:srgbClr val="333333"/>
-                </a:solidFill>
-                <a:latin typeface="Calibri"/>
-              </a:defRPr>
-            </a:pPr>
-            <a:r>
-              <a:t>• One teaching write: 7-bit `addr` + data byte on</a:t>
-            </a:r>
-          </a:p>
-          <a:p>
-            <a:pPr>
-              <a:lnSpc>
-                <a:spcPts val="2200"/>
-              </a:lnSpc>
-              <a:spcAft>
-                <a:spcPts val="1000"/>
-              </a:spcAft>
-              <a:defRPr sz="2000" b="0">
-                <a:solidFill>
-                  <a:srgbClr val="333333"/>
-                </a:solidFill>
-                <a:latin typeface="Calibri"/>
-              </a:defRPr>
-            </a:pPr>
-            <a:r>
-              <a:t>      `scl`/`sda` (push-pull model).</a:t>
-            </a:r>
-          </a:p>
-        </p:txBody>
-      </p:sp>
-      <p:sp>
-        <p:nvSpPr>
-          <p:cNvPr id="4" name="TextBox 3"/>
+              <a:defRPr sz="1200" b="0">
+                <a:solidFill>
+                  <a:srgbClr val="333333"/>
+                </a:solidFill>
+                <a:latin typeface="Calibri"/>
+              </a:defRPr>
+            </a:pPr>
+            <a:r>
+              <a:t>Module 7: DUT hierarchy and signal flow.</a:t>
+            </a:r>
+          </a:p>
+        </p:txBody>
+      </p:sp>
+      <p:sp>
+        <p:nvSpPr>
+          <p:cNvPr id="5" name="TextBox 4"/>
           <p:cNvSpPr txBox="1"/>
           <p:nvPr/>
         </p:nvSpPr>
@@ -4950,21 +5559,45 @@
               </a:defRPr>
             </a:pPr>
             <a:r>
-              <a:t>3. Teaching vs real I²C</a:t>
-            </a:r>
-          </a:p>
-        </p:txBody>
-      </p:sp>
-      <p:sp>
-        <p:nvSpPr>
-          <p:cNvPr id="3" name="TextBox 2"/>
+              <a:t>Verification / testbench diagram (reference)</a:t>
+            </a:r>
+          </a:p>
+        </p:txBody>
+      </p:sp>
+      <p:pic>
+        <p:nvPicPr>
+          <p:cNvPr id="3" name="Picture 2" descr="verification_architecture.png"/>
+          <p:cNvPicPr>
+            <a:picLocks noChangeAspect="1"/>
+          </p:cNvPicPr>
+          <p:nvPr/>
+        </p:nvPicPr>
+        <p:blipFill>
+          <a:blip r:embed="rId2"/>
+          <a:stretch>
+            <a:fillRect/>
+          </a:stretch>
+        </p:blipFill>
+        <p:spPr>
+          <a:xfrm>
+            <a:off x="548640" y="1143000"/>
+            <a:ext cx="8128000" cy="4572000"/>
+          </a:xfrm>
+          <a:prstGeom prst="rect">
+            <a:avLst/>
+          </a:prstGeom>
+        </p:spPr>
+      </p:pic>
+      <p:sp>
+        <p:nvSpPr>
+          <p:cNvPr id="4" name="TextBox 3"/>
           <p:cNvSpPr txBox="1"/>
           <p:nvPr/>
         </p:nvSpPr>
         <p:spPr>
           <a:xfrm>
-            <a:off x="548640" y="1234440"/>
-            <a:ext cx="11064240" cy="4937760"/>
+            <a:off x="548640" y="5897880"/>
+            <a:ext cx="11064240" cy="411480"/>
           </a:xfrm>
           <a:prstGeom prst="rect">
             <a:avLst/>
@@ -4981,44 +5614,22 @@
               <a:lnSpc>
                 <a:spcPts val="2200"/>
               </a:lnSpc>
-              <a:spcAft>
-                <a:spcPts val="1000"/>
-              </a:spcAft>
-              <a:defRPr sz="2000" b="0">
-                <a:solidFill>
-                  <a:srgbClr val="333333"/>
-                </a:solidFill>
-                <a:latin typeface="Calibri"/>
-              </a:defRPr>
-            </a:pPr>
-            <a:r>
-              <a:t>• No open-drain, ACK/NACK, or arbitration in baseline</a:t>
-            </a:r>
-          </a:p>
-          <a:p>
-            <a:pPr>
-              <a:lnSpc>
-                <a:spcPts val="2200"/>
-              </a:lnSpc>
-              <a:spcAft>
-                <a:spcPts val="1000"/>
-              </a:spcAft>
-              <a:defRPr sz="2000" b="0">
-                <a:solidFill>
-                  <a:srgbClr val="333333"/>
-                </a:solidFill>
-                <a:latin typeface="Calibri"/>
-              </a:defRPr>
-            </a:pPr>
-            <a:r>
-              <a:t>      — learn sequencing first.</a:t>
-            </a:r>
-          </a:p>
-        </p:txBody>
-      </p:sp>
-      <p:sp>
-        <p:nvSpPr>
-          <p:cNvPr id="4" name="TextBox 3"/>
+              <a:defRPr sz="1200" b="0">
+                <a:solidFill>
+                  <a:srgbClr val="333333"/>
+                </a:solidFill>
+                <a:latin typeface="Calibri"/>
+              </a:defRPr>
+            </a:pPr>
+            <a:r>
+              <a:t>Module 7: stimulus, observation, and checking.</a:t>
+            </a:r>
+          </a:p>
+        </p:txBody>
+      </p:sp>
+      <p:sp>
+        <p:nvSpPr>
+          <p:cNvPr id="5" name="TextBox 4"/>
           <p:cNvSpPr txBox="1"/>
           <p:nvPr/>
         </p:nvSpPr>
@@ -5081,8 +5692,8 @@
         </p:nvSpPr>
         <p:spPr>
           <a:xfrm>
-            <a:off x="548640" y="2743200"/>
-            <a:ext cx="11064240" cy="1371600"/>
+            <a:off x="548640" y="411480"/>
+            <a:ext cx="11064240" cy="777240"/>
           </a:xfrm>
           <a:prstGeom prst="rect">
             <a:avLst/>
@@ -5095,11 +5706,11 @@
           </a:bodyPr>
           <a:lstStyle/>
           <a:p>
-            <a:pPr algn="ctr">
-              <a:lnSpc>
-                <a:spcPts val="2200"/>
-              </a:lnSpc>
-              <a:defRPr sz="3600" b="1">
+            <a:pPr>
+              <a:lnSpc>
+                <a:spcPts val="2200"/>
+              </a:lnSpc>
+              <a:defRPr sz="2800" b="1">
                 <a:solidFill>
                   <a:srgbClr val="1A1A2E"/>
                 </a:solidFill>
@@ -5107,7 +5718,7 @@
               </a:defRPr>
             </a:pPr>
             <a:r>
-              <a:t>Verification &amp; testing methods</a:t>
+              <a:t>i2c_master FSM</a:t>
             </a:r>
           </a:p>
         </p:txBody>
@@ -5115,6 +5726,367 @@
       <p:sp>
         <p:nvSpPr>
           <p:cNvPr id="3" name="TextBox 2"/>
+          <p:cNvSpPr txBox="1"/>
+          <p:nvPr/>
+        </p:nvSpPr>
+        <p:spPr>
+          <a:xfrm>
+            <a:off x="548640" y="1143000"/>
+            <a:ext cx="11064240" cy="5029200"/>
+          </a:xfrm>
+          <a:prstGeom prst="rect">
+            <a:avLst/>
+          </a:prstGeom>
+          <a:solidFill>
+            <a:srgbClr val="F4F4F4"/>
+          </a:solidFill>
+        </p:spPr>
+        <p:txBody>
+          <a:bodyPr wrap="square">
+            <a:noAutofit/>
+          </a:bodyPr>
+          <a:lstStyle/>
+          <a:p>
+            <a:pPr>
+              <a:lnSpc>
+                <a:spcPts val="2200"/>
+              </a:lnSpc>
+              <a:spcAft>
+                <a:spcPts val="400"/>
+              </a:spcAft>
+              <a:defRPr sz="2000" b="0">
+                <a:solidFill>
+                  <a:srgbClr val="333333"/>
+                </a:solidFill>
+                <a:latin typeface="Consolas"/>
+              </a:defRPr>
+            </a:pPr>
+            <a:r>
+              <a:t>// Simple I2C master (baseline write-only, single target).</a:t>
+            </a:r>
+          </a:p>
+          <a:p>
+            <a:pPr>
+              <a:lnSpc>
+                <a:spcPts val="2200"/>
+              </a:lnSpc>
+              <a:spcAft>
+                <a:spcPts val="400"/>
+              </a:spcAft>
+              <a:defRPr sz="2000" b="0">
+                <a:solidFill>
+                  <a:srgbClr val="333333"/>
+                </a:solidFill>
+                <a:latin typeface="Consolas"/>
+              </a:defRPr>
+            </a:pPr>
+            <a:r>
+              <a:t>// Teaching example: we treat SCL/SDA as simple push-pull signals, not</a:t>
+            </a:r>
+          </a:p>
+          <a:p>
+            <a:pPr>
+              <a:lnSpc>
+                <a:spcPts val="2200"/>
+              </a:lnSpc>
+              <a:spcAft>
+                <a:spcPts val="400"/>
+              </a:spcAft>
+              <a:defRPr sz="2000" b="0">
+                <a:solidFill>
+                  <a:srgbClr val="333333"/>
+                </a:solidFill>
+                <a:latin typeface="Consolas"/>
+              </a:defRPr>
+            </a:pPr>
+            <a:r>
+              <a:t>full</a:t>
+            </a:r>
+          </a:p>
+          <a:p>
+            <a:pPr>
+              <a:lnSpc>
+                <a:spcPts val="2200"/>
+              </a:lnSpc>
+              <a:spcAft>
+                <a:spcPts val="400"/>
+              </a:spcAft>
+              <a:defRPr sz="2000" b="0">
+                <a:solidFill>
+                  <a:srgbClr val="333333"/>
+                </a:solidFill>
+                <a:latin typeface="Consolas"/>
+              </a:defRPr>
+            </a:pPr>
+            <a:r>
+              <a:t>// open-drain with multi-master arbitration. Focus is on bit timing and</a:t>
+            </a:r>
+          </a:p>
+          <a:p>
+            <a:pPr>
+              <a:lnSpc>
+                <a:spcPts val="2200"/>
+              </a:lnSpc>
+              <a:spcAft>
+                <a:spcPts val="400"/>
+              </a:spcAft>
+              <a:defRPr sz="2000" b="0">
+                <a:solidFill>
+                  <a:srgbClr val="333333"/>
+                </a:solidFill>
+                <a:latin typeface="Consolas"/>
+              </a:defRPr>
+            </a:pPr>
+            <a:r>
+              <a:t>// start/address/data/stop sequencing.</a:t>
+            </a:r>
+          </a:p>
+          <a:p>
+            <a:pPr>
+              <a:lnSpc>
+                <a:spcPts val="2200"/>
+              </a:lnSpc>
+              <a:spcAft>
+                <a:spcPts val="400"/>
+              </a:spcAft>
+              <a:defRPr sz="2000" b="0">
+                <a:solidFill>
+                  <a:srgbClr val="333333"/>
+                </a:solidFill>
+                <a:latin typeface="Consolas"/>
+              </a:defRPr>
+            </a:pPr>
+            <a:r>
+              <a:t>//</a:t>
+            </a:r>
+          </a:p>
+          <a:p>
+            <a:pPr>
+              <a:lnSpc>
+                <a:spcPts val="2200"/>
+              </a:lnSpc>
+              <a:spcAft>
+                <a:spcPts val="400"/>
+              </a:spcAft>
+              <a:defRPr sz="2000" b="0">
+                <a:solidFill>
+                  <a:srgbClr val="333333"/>
+                </a:solidFill>
+                <a:latin typeface="Consolas"/>
+              </a:defRPr>
+            </a:pPr>
+            <a:r>
+              <a:t>// One transaction:</a:t>
+            </a:r>
+          </a:p>
+          <a:p>
+            <a:pPr>
+              <a:lnSpc>
+                <a:spcPts val="2200"/>
+              </a:lnSpc>
+              <a:spcAft>
+                <a:spcPts val="400"/>
+              </a:spcAft>
+              <a:defRPr sz="2000" b="0">
+                <a:solidFill>
+                  <a:srgbClr val="333333"/>
+                </a:solidFill>
+                <a:latin typeface="Consolas"/>
+              </a:defRPr>
+            </a:pPr>
+            <a:r>
+              <a:t>//   - START</a:t>
+            </a:r>
+          </a:p>
+          <a:p>
+            <a:pPr>
+              <a:lnSpc>
+                <a:spcPts val="2200"/>
+              </a:lnSpc>
+              <a:spcAft>
+                <a:spcPts val="400"/>
+              </a:spcAft>
+              <a:defRPr sz="2000" b="0">
+                <a:solidFill>
+                  <a:srgbClr val="333333"/>
+                </a:solidFill>
+                <a:latin typeface="Consolas"/>
+              </a:defRPr>
+            </a:pPr>
+            <a:r>
+              <a:t>//   - 7-bit address + write bit (0)</a:t>
+            </a:r>
+          </a:p>
+          <a:p>
+            <a:pPr>
+              <a:lnSpc>
+                <a:spcPts val="2200"/>
+              </a:lnSpc>
+              <a:spcAft>
+                <a:spcPts val="400"/>
+              </a:spcAft>
+              <a:defRPr sz="2000" b="0">
+                <a:solidFill>
+                  <a:srgbClr val="333333"/>
+                </a:solidFill>
+                <a:latin typeface="Consolas"/>
+              </a:defRPr>
+            </a:pPr>
+            <a:r>
+              <a:t>//   - 8-bit data byte</a:t>
+            </a:r>
+          </a:p>
+          <a:p>
+            <a:pPr>
+              <a:lnSpc>
+                <a:spcPts val="2200"/>
+              </a:lnSpc>
+              <a:spcAft>
+                <a:spcPts val="400"/>
+              </a:spcAft>
+              <a:defRPr sz="2000" b="0">
+                <a:solidFill>
+                  <a:srgbClr val="333333"/>
+                </a:solidFill>
+                <a:latin typeface="Consolas"/>
+              </a:defRPr>
+            </a:pPr>
+            <a:r>
+              <a:t>//   - STOP</a:t>
+            </a:r>
+          </a:p>
+          <a:p>
+            <a:pPr>
+              <a:lnSpc>
+                <a:spcPts val="2200"/>
+              </a:lnSpc>
+              <a:spcAft>
+                <a:spcPts val="400"/>
+              </a:spcAft>
+              <a:defRPr sz="2000" b="0">
+                <a:solidFill>
+                  <a:srgbClr val="333333"/>
+                </a:solidFill>
+                <a:latin typeface="Consolas"/>
+              </a:defRPr>
+            </a:pPr>
+          </a:p>
+          <a:p>
+            <a:pPr>
+              <a:lnSpc>
+                <a:spcPts val="2200"/>
+              </a:lnSpc>
+              <a:spcAft>
+                <a:spcPts val="400"/>
+              </a:spcAft>
+              <a:defRPr sz="2000" b="0">
+                <a:solidFill>
+                  <a:srgbClr val="333333"/>
+                </a:solidFill>
+                <a:latin typeface="Consolas"/>
+              </a:defRPr>
+            </a:pPr>
+            <a:r>
+              <a:t>`timescale 1ns/1ps</a:t>
+            </a:r>
+          </a:p>
+          <a:p>
+            <a:pPr>
+              <a:lnSpc>
+                <a:spcPts val="2200"/>
+              </a:lnSpc>
+              <a:spcAft>
+                <a:spcPts val="400"/>
+              </a:spcAft>
+              <a:defRPr sz="2000" b="0">
+                <a:solidFill>
+                  <a:srgbClr val="333333"/>
+                </a:solidFill>
+                <a:latin typeface="Consolas"/>
+              </a:defRPr>
+            </a:pPr>
+          </a:p>
+          <a:p>
+            <a:pPr>
+              <a:lnSpc>
+                <a:spcPts val="2200"/>
+              </a:lnSpc>
+              <a:spcAft>
+                <a:spcPts val="400"/>
+              </a:spcAft>
+              <a:defRPr sz="2000" b="0">
+                <a:solidFill>
+                  <a:srgbClr val="333333"/>
+                </a:solidFill>
+                <a:latin typeface="Consolas"/>
+              </a:defRPr>
+            </a:pPr>
+            <a:r>
+              <a:t>module i2c_master (</a:t>
+            </a:r>
+          </a:p>
+          <a:p>
+            <a:pPr>
+              <a:lnSpc>
+                <a:spcPts val="2200"/>
+              </a:lnSpc>
+              <a:spcAft>
+                <a:spcPts val="400"/>
+              </a:spcAft>
+              <a:defRPr sz="2000" b="0">
+                <a:solidFill>
+                  <a:srgbClr val="333333"/>
+                </a:solidFill>
+                <a:latin typeface="Consolas"/>
+              </a:defRPr>
+            </a:pPr>
+            <a:r>
+              <a:t>    input  wire       clk,</a:t>
+            </a:r>
+          </a:p>
+          <a:p>
+            <a:pPr>
+              <a:lnSpc>
+                <a:spcPts val="2200"/>
+              </a:lnSpc>
+              <a:spcAft>
+                <a:spcPts val="400"/>
+              </a:spcAft>
+              <a:defRPr sz="2000" b="0">
+                <a:solidFill>
+                  <a:srgbClr val="333333"/>
+                </a:solidFill>
+                <a:latin typeface="Consolas"/>
+              </a:defRPr>
+            </a:pPr>
+            <a:r>
+              <a:t>    input  wire       rst_n,        // Active-low async reset</a:t>
+            </a:r>
+          </a:p>
+          <a:p>
+            <a:pPr>
+              <a:lnSpc>
+                <a:spcPts val="2200"/>
+              </a:lnSpc>
+              <a:spcAft>
+                <a:spcPts val="400"/>
+              </a:spcAft>
+              <a:defRPr sz="2000" b="0">
+                <a:solidFill>
+                  <a:srgbClr val="333333"/>
+                </a:solidFill>
+                <a:latin typeface="Consolas"/>
+              </a:defRPr>
+            </a:pPr>
+            <a:r>
+              <a:t># ...</a:t>
+            </a:r>
+          </a:p>
+        </p:txBody>
+      </p:sp>
+      <p:sp>
+        <p:nvSpPr>
+          <p:cNvPr id="4" name="TextBox 3"/>
           <p:cNvSpPr txBox="1"/>
           <p:nvPr/>
         </p:nvSpPr>
@@ -5203,50 +6175,28 @@
               </a:defRPr>
             </a:pPr>
             <a:r>
-              <a:t>Testing and closure flow</a:t>
-            </a:r>
-          </a:p>
-        </p:txBody>
-      </p:sp>
-      <p:pic>
-        <p:nvPicPr>
-          <p:cNvPr id="3" name="Picture 2" descr="testing_methods.png"/>
-          <p:cNvPicPr>
-            <a:picLocks noChangeAspect="1"/>
-          </p:cNvPicPr>
+              <a:t>clk_div — SCL timing</a:t>
+            </a:r>
+          </a:p>
+        </p:txBody>
+      </p:sp>
+      <p:sp>
+        <p:nvSpPr>
+          <p:cNvPr id="3" name="TextBox 2"/>
+          <p:cNvSpPr txBox="1"/>
           <p:nvPr/>
-        </p:nvPicPr>
-        <p:blipFill>
-          <a:blip r:embed="rId2"/>
-          <a:stretch>
-            <a:fillRect/>
-          </a:stretch>
-        </p:blipFill>
+        </p:nvSpPr>
         <p:spPr>
           <a:xfrm>
             <a:off x="548640" y="1143000"/>
-            <a:ext cx="8128000" cy="4572000"/>
+            <a:ext cx="11064240" cy="5029200"/>
           </a:xfrm>
           <a:prstGeom prst="rect">
             <a:avLst/>
           </a:prstGeom>
-        </p:spPr>
-      </p:pic>
-      <p:sp>
-        <p:nvSpPr>
-          <p:cNvPr id="4" name="TextBox 3"/>
-          <p:cNvSpPr txBox="1"/>
-          <p:nvPr/>
-        </p:nvSpPr>
-        <p:spPr>
-          <a:xfrm>
-            <a:off x="548640" y="5897880"/>
-            <a:ext cx="11064240" cy="411480"/>
-          </a:xfrm>
-          <a:prstGeom prst="rect">
-            <a:avLst/>
-          </a:prstGeom>
-          <a:noFill/>
+          <a:solidFill>
+            <a:srgbClr val="F4F4F4"/>
+          </a:solidFill>
         </p:spPr>
         <p:txBody>
           <a:bodyPr wrap="square">
@@ -5258,22 +6208,339 @@
               <a:lnSpc>
                 <a:spcPts val="2200"/>
               </a:lnSpc>
-              <a:defRPr sz="1200" b="0">
-                <a:solidFill>
-                  <a:srgbClr val="333333"/>
-                </a:solidFill>
-                <a:latin typeface="Calibri"/>
-              </a:defRPr>
-            </a:pPr>
-            <a:r>
-              <a:t>Module 7: how tests, checks, and metrics close verification goals.</a:t>
-            </a:r>
-          </a:p>
-        </p:txBody>
-      </p:sp>
-      <p:sp>
-        <p:nvSpPr>
-          <p:cNvPr id="5" name="TextBox 4"/>
+              <a:spcAft>
+                <a:spcPts val="400"/>
+              </a:spcAft>
+              <a:defRPr sz="2000" b="0">
+                <a:solidFill>
+                  <a:srgbClr val="333333"/>
+                </a:solidFill>
+                <a:latin typeface="Consolas"/>
+              </a:defRPr>
+            </a:pPr>
+            <a:r>
+              <a:t>// Simple clock divider for I2C SCL timing (teaching example).</a:t>
+            </a:r>
+          </a:p>
+          <a:p>
+            <a:pPr>
+              <a:lnSpc>
+                <a:spcPts val="2200"/>
+              </a:lnSpc>
+              <a:spcAft>
+                <a:spcPts val="400"/>
+              </a:spcAft>
+              <a:defRPr sz="2000" b="0">
+                <a:solidFill>
+                  <a:srgbClr val="333333"/>
+                </a:solidFill>
+                <a:latin typeface="Consolas"/>
+              </a:defRPr>
+            </a:pPr>
+            <a:r>
+              <a:t>// Generates a 1-cycle-wide clk_div_tick pulse every DIVIDER cycles of</a:t>
+            </a:r>
+          </a:p>
+          <a:p>
+            <a:pPr>
+              <a:lnSpc>
+                <a:spcPts val="2200"/>
+              </a:lnSpc>
+              <a:spcAft>
+                <a:spcPts val="400"/>
+              </a:spcAft>
+              <a:defRPr sz="2000" b="0">
+                <a:solidFill>
+                  <a:srgbClr val="333333"/>
+                </a:solidFill>
+                <a:latin typeface="Consolas"/>
+              </a:defRPr>
+            </a:pPr>
+            <a:r>
+              <a:t>clk.</a:t>
+            </a:r>
+          </a:p>
+          <a:p>
+            <a:pPr>
+              <a:lnSpc>
+                <a:spcPts val="2200"/>
+              </a:lnSpc>
+              <a:spcAft>
+                <a:spcPts val="400"/>
+              </a:spcAft>
+              <a:defRPr sz="2000" b="0">
+                <a:solidFill>
+                  <a:srgbClr val="333333"/>
+                </a:solidFill>
+                <a:latin typeface="Consolas"/>
+              </a:defRPr>
+            </a:pPr>
+          </a:p>
+          <a:p>
+            <a:pPr>
+              <a:lnSpc>
+                <a:spcPts val="2200"/>
+              </a:lnSpc>
+              <a:spcAft>
+                <a:spcPts val="400"/>
+              </a:spcAft>
+              <a:defRPr sz="2000" b="0">
+                <a:solidFill>
+                  <a:srgbClr val="333333"/>
+                </a:solidFill>
+                <a:latin typeface="Consolas"/>
+              </a:defRPr>
+            </a:pPr>
+            <a:r>
+              <a:t>`timescale 1ns/1ps</a:t>
+            </a:r>
+          </a:p>
+          <a:p>
+            <a:pPr>
+              <a:lnSpc>
+                <a:spcPts val="2200"/>
+              </a:lnSpc>
+              <a:spcAft>
+                <a:spcPts val="400"/>
+              </a:spcAft>
+              <a:defRPr sz="2000" b="0">
+                <a:solidFill>
+                  <a:srgbClr val="333333"/>
+                </a:solidFill>
+                <a:latin typeface="Consolas"/>
+              </a:defRPr>
+            </a:pPr>
+          </a:p>
+          <a:p>
+            <a:pPr>
+              <a:lnSpc>
+                <a:spcPts val="2200"/>
+              </a:lnSpc>
+              <a:spcAft>
+                <a:spcPts val="400"/>
+              </a:spcAft>
+              <a:defRPr sz="2000" b="0">
+                <a:solidFill>
+                  <a:srgbClr val="333333"/>
+                </a:solidFill>
+                <a:latin typeface="Consolas"/>
+              </a:defRPr>
+            </a:pPr>
+            <a:r>
+              <a:t>module clk_div #(</a:t>
+            </a:r>
+          </a:p>
+          <a:p>
+            <a:pPr>
+              <a:lnSpc>
+                <a:spcPts val="2200"/>
+              </a:lnSpc>
+              <a:spcAft>
+                <a:spcPts val="400"/>
+              </a:spcAft>
+              <a:defRPr sz="2000" b="0">
+                <a:solidFill>
+                  <a:srgbClr val="333333"/>
+                </a:solidFill>
+                <a:latin typeface="Consolas"/>
+              </a:defRPr>
+            </a:pPr>
+            <a:r>
+              <a:t>    parameter int DIVIDER = 8</a:t>
+            </a:r>
+          </a:p>
+          <a:p>
+            <a:pPr>
+              <a:lnSpc>
+                <a:spcPts val="2200"/>
+              </a:lnSpc>
+              <a:spcAft>
+                <a:spcPts val="400"/>
+              </a:spcAft>
+              <a:defRPr sz="2000" b="0">
+                <a:solidFill>
+                  <a:srgbClr val="333333"/>
+                </a:solidFill>
+                <a:latin typeface="Consolas"/>
+              </a:defRPr>
+            </a:pPr>
+            <a:r>
+              <a:t>) (</a:t>
+            </a:r>
+          </a:p>
+          <a:p>
+            <a:pPr>
+              <a:lnSpc>
+                <a:spcPts val="2200"/>
+              </a:lnSpc>
+              <a:spcAft>
+                <a:spcPts val="400"/>
+              </a:spcAft>
+              <a:defRPr sz="2000" b="0">
+                <a:solidFill>
+                  <a:srgbClr val="333333"/>
+                </a:solidFill>
+                <a:latin typeface="Consolas"/>
+              </a:defRPr>
+            </a:pPr>
+            <a:r>
+              <a:t>    input  wire clk,</a:t>
+            </a:r>
+          </a:p>
+          <a:p>
+            <a:pPr>
+              <a:lnSpc>
+                <a:spcPts val="2200"/>
+              </a:lnSpc>
+              <a:spcAft>
+                <a:spcPts val="400"/>
+              </a:spcAft>
+              <a:defRPr sz="2000" b="0">
+                <a:solidFill>
+                  <a:srgbClr val="333333"/>
+                </a:solidFill>
+                <a:latin typeface="Consolas"/>
+              </a:defRPr>
+            </a:pPr>
+            <a:r>
+              <a:t>    input  wire rst_n,       // Active-low async reset</a:t>
+            </a:r>
+          </a:p>
+          <a:p>
+            <a:pPr>
+              <a:lnSpc>
+                <a:spcPts val="2200"/>
+              </a:lnSpc>
+              <a:spcAft>
+                <a:spcPts val="400"/>
+              </a:spcAft>
+              <a:defRPr sz="2000" b="0">
+                <a:solidFill>
+                  <a:srgbClr val="333333"/>
+                </a:solidFill>
+                <a:latin typeface="Consolas"/>
+              </a:defRPr>
+            </a:pPr>
+            <a:r>
+              <a:t>    output reg  clk_div_tick // One-cycle pulse at divided rate</a:t>
+            </a:r>
+          </a:p>
+          <a:p>
+            <a:pPr>
+              <a:lnSpc>
+                <a:spcPts val="2200"/>
+              </a:lnSpc>
+              <a:spcAft>
+                <a:spcPts val="400"/>
+              </a:spcAft>
+              <a:defRPr sz="2000" b="0">
+                <a:solidFill>
+                  <a:srgbClr val="333333"/>
+                </a:solidFill>
+                <a:latin typeface="Consolas"/>
+              </a:defRPr>
+            </a:pPr>
+            <a:r>
+              <a:t>);</a:t>
+            </a:r>
+          </a:p>
+          <a:p>
+            <a:pPr>
+              <a:lnSpc>
+                <a:spcPts val="2200"/>
+              </a:lnSpc>
+              <a:spcAft>
+                <a:spcPts val="400"/>
+              </a:spcAft>
+              <a:defRPr sz="2000" b="0">
+                <a:solidFill>
+                  <a:srgbClr val="333333"/>
+                </a:solidFill>
+                <a:latin typeface="Consolas"/>
+              </a:defRPr>
+            </a:pPr>
+            <a:r>
+              <a:t>    int count;</a:t>
+            </a:r>
+          </a:p>
+          <a:p>
+            <a:pPr>
+              <a:lnSpc>
+                <a:spcPts val="2200"/>
+              </a:lnSpc>
+              <a:spcAft>
+                <a:spcPts val="400"/>
+              </a:spcAft>
+              <a:defRPr sz="2000" b="0">
+                <a:solidFill>
+                  <a:srgbClr val="333333"/>
+                </a:solidFill>
+                <a:latin typeface="Consolas"/>
+              </a:defRPr>
+            </a:pPr>
+          </a:p>
+          <a:p>
+            <a:pPr>
+              <a:lnSpc>
+                <a:spcPts val="2200"/>
+              </a:lnSpc>
+              <a:spcAft>
+                <a:spcPts val="400"/>
+              </a:spcAft>
+              <a:defRPr sz="2000" b="0">
+                <a:solidFill>
+                  <a:srgbClr val="333333"/>
+                </a:solidFill>
+                <a:latin typeface="Consolas"/>
+              </a:defRPr>
+            </a:pPr>
+            <a:r>
+              <a:t>    always @(posedge clk or negedge rst_n) begin</a:t>
+            </a:r>
+          </a:p>
+          <a:p>
+            <a:pPr>
+              <a:lnSpc>
+                <a:spcPts val="2200"/>
+              </a:lnSpc>
+              <a:spcAft>
+                <a:spcPts val="400"/>
+              </a:spcAft>
+              <a:defRPr sz="2000" b="0">
+                <a:solidFill>
+                  <a:srgbClr val="333333"/>
+                </a:solidFill>
+                <a:latin typeface="Consolas"/>
+              </a:defRPr>
+            </a:pPr>
+            <a:r>
+              <a:t>        if (!rst_n) begin</a:t>
+            </a:r>
+          </a:p>
+          <a:p>
+            <a:pPr>
+              <a:lnSpc>
+                <a:spcPts val="2200"/>
+              </a:lnSpc>
+              <a:spcAft>
+                <a:spcPts val="400"/>
+              </a:spcAft>
+              <a:defRPr sz="2000" b="0">
+                <a:solidFill>
+                  <a:srgbClr val="333333"/>
+                </a:solidFill>
+                <a:latin typeface="Consolas"/>
+              </a:defRPr>
+            </a:pPr>
+            <a:r>
+              <a:t># ...</a:t>
+            </a:r>
+          </a:p>
+        </p:txBody>
+      </p:sp>
+      <p:sp>
+        <p:nvSpPr>
+          <p:cNvPr id="4" name="TextBox 3"/>
           <p:cNvSpPr txBox="1"/>
           <p:nvPr/>
         </p:nvSpPr>
@@ -5336,8 +6603,8 @@
         </p:nvSpPr>
         <p:spPr>
           <a:xfrm>
-            <a:off x="548640" y="411480"/>
-            <a:ext cx="11064240" cy="777240"/>
+            <a:off x="548640" y="2743200"/>
+            <a:ext cx="11064240" cy="1371600"/>
           </a:xfrm>
           <a:prstGeom prst="rect">
             <a:avLst/>
@@ -5350,11 +6617,11 @@
           </a:bodyPr>
           <a:lstStyle/>
           <a:p>
-            <a:pPr>
-              <a:lnSpc>
-                <a:spcPts val="2200"/>
-              </a:lnSpc>
-              <a:defRPr sz="2800" b="1">
+            <a:pPr algn="ctr">
+              <a:lnSpc>
+                <a:spcPts val="2200"/>
+              </a:lnSpc>
+              <a:defRPr sz="3600" b="1">
                 <a:solidFill>
                   <a:srgbClr val="1A1A2E"/>
                 </a:solidFill>
@@ -5362,7 +6629,7 @@
               </a:defRPr>
             </a:pPr>
             <a:r>
-              <a:t>1. Inline bus monitor</a:t>
+              <a:t>Execution &amp; simulation flow</a:t>
             </a:r>
           </a:p>
         </p:txBody>
@@ -5370,67 +6637,6 @@
       <p:sp>
         <p:nvSpPr>
           <p:cNvPr id="3" name="TextBox 2"/>
-          <p:cNvSpPr txBox="1"/>
-          <p:nvPr/>
-        </p:nvSpPr>
-        <p:spPr>
-          <a:xfrm>
-            <a:off x="548640" y="1234440"/>
-            <a:ext cx="11064240" cy="4937760"/>
-          </a:xfrm>
-          <a:prstGeom prst="rect">
-            <a:avLst/>
-          </a:prstGeom>
-          <a:noFill/>
-        </p:spPr>
-        <p:txBody>
-          <a:bodyPr wrap="square">
-            <a:noAutofit/>
-          </a:bodyPr>
-          <a:lstStyle/>
-          <a:p>
-            <a:pPr>
-              <a:lnSpc>
-                <a:spcPts val="2200"/>
-              </a:lnSpc>
-              <a:spcAft>
-                <a:spcPts val="1000"/>
-              </a:spcAft>
-              <a:defRPr sz="2000" b="0">
-                <a:solidFill>
-                  <a:srgbClr val="333333"/>
-                </a:solidFill>
-                <a:latin typeface="Calibri"/>
-              </a:defRPr>
-            </a:pPr>
-            <a:r>
-              <a:t>• Top module detects START; samples SDA on rising SCL;</a:t>
-            </a:r>
-          </a:p>
-          <a:p>
-            <a:pPr>
-              <a:lnSpc>
-                <a:spcPts val="2200"/>
-              </a:lnSpc>
-              <a:spcAft>
-                <a:spcPts val="1000"/>
-              </a:spcAft>
-              <a:defRPr sz="2000" b="0">
-                <a:solidFill>
-                  <a:srgbClr val="333333"/>
-                </a:solidFill>
-                <a:latin typeface="Calibri"/>
-              </a:defRPr>
-            </a:pPr>
-            <a:r>
-              <a:t>      rebuilds addr+W and data.</a:t>
-            </a:r>
-          </a:p>
-        </p:txBody>
-      </p:sp>
-      <p:sp>
-        <p:nvSpPr>
-          <p:cNvPr id="4" name="TextBox 3"/>
           <p:cNvSpPr txBox="1"/>
           <p:nvPr/>
         </p:nvSpPr>
@@ -5519,7 +6725,7 @@
               </a:defRPr>
             </a:pPr>
             <a:r>
-              <a:t>2. Self-check flow</a:t>
+              <a:t>How the example runs (toolchain)</a:t>
             </a:r>
           </a:p>
         </p:txBody>
@@ -5561,7 +6767,7 @@
               </a:defRPr>
             </a:pPr>
             <a:r>
-              <a:t>• Compare captured bytes to driven `addr`/`data_in`;</a:t>
+              <a:t>• Makefile: Verilator compiles RTL + SystemVerilog</a:t>
             </a:r>
           </a:p>
           <a:p>
@@ -5580,7 +6786,159 @@
               </a:defRPr>
             </a:pPr>
             <a:r>
-              <a:t>      print `I2C baseline test PASS`.</a:t>
+              <a:t>      testbench into a C++ model</a:t>
+            </a:r>
+          </a:p>
+          <a:p>
+            <a:pPr>
+              <a:lnSpc>
+                <a:spcPts val="2200"/>
+              </a:lnSpc>
+              <a:spcAft>
+                <a:spcPts val="1000"/>
+              </a:spcAft>
+              <a:defRPr sz="2000" b="0">
+                <a:solidFill>
+                  <a:srgbClr val="333333"/>
+                </a:solidFill>
+                <a:latin typeface="Calibri"/>
+              </a:defRPr>
+            </a:pPr>
+            <a:r>
+              <a:t>• sim_main.cpp: generates clk/rst_n, calls eval()</a:t>
+            </a:r>
+          </a:p>
+          <a:p>
+            <a:pPr>
+              <a:lnSpc>
+                <a:spcPts val="2200"/>
+              </a:lnSpc>
+              <a:spcAft>
+                <a:spcPts val="1000"/>
+              </a:spcAft>
+              <a:defRPr sz="2000" b="0">
+                <a:solidFill>
+                  <a:srgbClr val="333333"/>
+                </a:solidFill>
+                <a:latin typeface="Calibri"/>
+              </a:defRPr>
+            </a:pPr>
+            <a:r>
+              <a:t>      until $finish</a:t>
+            </a:r>
+          </a:p>
+          <a:p>
+            <a:pPr>
+              <a:lnSpc>
+                <a:spcPts val="2200"/>
+              </a:lnSpc>
+              <a:spcAft>
+                <a:spcPts val="1000"/>
+              </a:spcAft>
+              <a:defRPr sz="2000" b="0">
+                <a:solidFill>
+                  <a:srgbClr val="333333"/>
+                </a:solidFill>
+                <a:latin typeface="Calibri"/>
+              </a:defRPr>
+            </a:pPr>
+            <a:r>
+              <a:t>• Directed test (initial block or C++): drive</a:t>
+            </a:r>
+          </a:p>
+          <a:p>
+            <a:pPr>
+              <a:lnSpc>
+                <a:spcPts val="2200"/>
+              </a:lnSpc>
+              <a:spcAft>
+                <a:spcPts val="1000"/>
+              </a:spcAft>
+              <a:defRPr sz="2000" b="0">
+                <a:solidFill>
+                  <a:srgbClr val="333333"/>
+                </a:solidFill>
+                <a:latin typeface="Calibri"/>
+              </a:defRPr>
+            </a:pPr>
+            <a:r>
+              <a:t>      stimulus, wait for DUT flags</a:t>
+            </a:r>
+          </a:p>
+          <a:p>
+            <a:pPr>
+              <a:lnSpc>
+                <a:spcPts val="2200"/>
+              </a:lnSpc>
+              <a:spcAft>
+                <a:spcPts val="1000"/>
+              </a:spcAft>
+              <a:defRPr sz="2000" b="0">
+                <a:solidFill>
+                  <a:srgbClr val="333333"/>
+                </a:solidFill>
+                <a:latin typeface="Calibri"/>
+              </a:defRPr>
+            </a:pPr>
+            <a:r>
+              <a:t>• Self-check: compare outputs; print PASS/FAIL (see</a:t>
+            </a:r>
+          </a:p>
+          <a:p>
+            <a:pPr>
+              <a:lnSpc>
+                <a:spcPts val="2200"/>
+              </a:lnSpc>
+              <a:spcAft>
+                <a:spcPts val="1000"/>
+              </a:spcAft>
+              <a:defRPr sz="2000" b="0">
+                <a:solidFill>
+                  <a:srgbClr val="333333"/>
+                </a:solidFill>
+                <a:latin typeface="Calibri"/>
+              </a:defRPr>
+            </a:pPr>
+            <a:r>
+              <a:t>      terminal demo slide)</a:t>
+            </a:r>
+          </a:p>
+          <a:p>
+            <a:pPr>
+              <a:lnSpc>
+                <a:spcPts val="2200"/>
+              </a:lnSpc>
+              <a:spcAft>
+                <a:spcPts val="1000"/>
+              </a:spcAft>
+              <a:defRPr sz="2000" b="0">
+                <a:solidFill>
+                  <a:srgbClr val="333333"/>
+                </a:solidFill>
+                <a:latin typeface="Calibri"/>
+              </a:defRPr>
+            </a:pPr>
+            <a:r>
+              <a:t>• Repo path: module7/examples/&lt;example&gt;/ — run make</a:t>
+            </a:r>
+          </a:p>
+          <a:p>
+            <a:pPr>
+              <a:lnSpc>
+                <a:spcPts val="2200"/>
+              </a:lnSpc>
+              <a:spcAft>
+                <a:spcPts val="1000"/>
+              </a:spcAft>
+              <a:defRPr sz="2000" b="0">
+                <a:solidFill>
+                  <a:srgbClr val="333333"/>
+                </a:solidFill>
+                <a:latin typeface="Calibri"/>
+              </a:defRPr>
+            </a:pPr>
+            <a:r>
+              <a:t>      run from that directory</a:t>
             </a:r>
           </a:p>
         </p:txBody>
@@ -5676,7 +7034,7 @@
               </a:defRPr>
             </a:pPr>
             <a:r>
-              <a:t>3. Path to Module 8</a:t>
+              <a:t>Example directory layout</a:t>
             </a:r>
           </a:p>
         </p:txBody>
@@ -5718,7 +7076,7 @@
               </a:defRPr>
             </a:pPr>
             <a:r>
-              <a:t>• Move monitor into I2cMonitor; scoreboard splits</a:t>
+              <a:t>• dut/: i2c_master.v, clk_div.v</a:t>
             </a:r>
           </a:p>
           <a:p>
@@ -5737,7 +7095,64 @@
               </a:defRPr>
             </a:pPr>
             <a:r>
-              <a:t>      address and data phases.</a:t>
+              <a:t>• top_i2c_baseline.sv: Instantiates DUT + directed</a:t>
+            </a:r>
+          </a:p>
+          <a:p>
+            <a:pPr>
+              <a:lnSpc>
+                <a:spcPts val="2200"/>
+              </a:lnSpc>
+              <a:spcAft>
+                <a:spcPts val="1000"/>
+              </a:spcAft>
+              <a:defRPr sz="2000" b="0">
+                <a:solidFill>
+                  <a:srgbClr val="333333"/>
+                </a:solidFill>
+                <a:latin typeface="Calibri"/>
+              </a:defRPr>
+            </a:pPr>
+            <a:r>
+              <a:t>      test + monitor/self-check</a:t>
+            </a:r>
+          </a:p>
+          <a:p>
+            <a:pPr>
+              <a:lnSpc>
+                <a:spcPts val="2200"/>
+              </a:lnSpc>
+              <a:spcAft>
+                <a:spcPts val="1000"/>
+              </a:spcAft>
+              <a:defRPr sz="2000" b="0">
+                <a:solidFill>
+                  <a:srgbClr val="333333"/>
+                </a:solidFill>
+                <a:latin typeface="Calibri"/>
+              </a:defRPr>
+            </a:pPr>
+            <a:r>
+              <a:t>• sim_main.cpp: Clock/reset harness; simulation runs</a:t>
+            </a:r>
+          </a:p>
+          <a:p>
+            <a:pPr>
+              <a:lnSpc>
+                <a:spcPts val="2200"/>
+              </a:lnSpc>
+              <a:spcAft>
+                <a:spcPts val="1000"/>
+              </a:spcAft>
+              <a:defRPr sz="2000" b="0">
+                <a:solidFill>
+                  <a:srgbClr val="333333"/>
+                </a:solidFill>
+                <a:latin typeface="Calibri"/>
+              </a:defRPr>
+            </a:pPr>
+            <a:r>
+              <a:t>      until $finish</a:t>
             </a:r>
           </a:p>
         </p:txBody>
@@ -5807,8 +7222,8 @@
         </p:nvSpPr>
         <p:spPr>
           <a:xfrm>
-            <a:off x="548640" y="2743200"/>
-            <a:ext cx="11064240" cy="1371600"/>
+            <a:off x="548640" y="411480"/>
+            <a:ext cx="11064240" cy="777240"/>
           </a:xfrm>
           <a:prstGeom prst="rect">
             <a:avLst/>
@@ -5821,11 +7236,11 @@
           </a:bodyPr>
           <a:lstStyle/>
           <a:p>
-            <a:pPr algn="ctr">
-              <a:lnSpc>
-                <a:spcPts val="2200"/>
-              </a:lnSpc>
-              <a:defRPr sz="3600" b="1">
+            <a:pPr>
+              <a:lnSpc>
+                <a:spcPts val="2200"/>
+              </a:lnSpc>
+              <a:defRPr sz="2800" b="1">
                 <a:solidFill>
                   <a:srgbClr val="1A1A2E"/>
                 </a:solidFill>
@@ -5833,7 +7248,7 @@
               </a:defRPr>
             </a:pPr>
             <a:r>
-              <a:t>Syllabus topics</a:t>
+              <a:t>Makefile — i2c_baseline run</a:t>
             </a:r>
           </a:p>
         </p:txBody>
@@ -5841,6 +7256,361 @@
       <p:sp>
         <p:nvSpPr>
           <p:cNvPr id="3" name="TextBox 2"/>
+          <p:cNvSpPr txBox="1"/>
+          <p:nvPr/>
+        </p:nvSpPr>
+        <p:spPr>
+          <a:xfrm>
+            <a:off x="548640" y="1143000"/>
+            <a:ext cx="11064240" cy="5029200"/>
+          </a:xfrm>
+          <a:prstGeom prst="rect">
+            <a:avLst/>
+          </a:prstGeom>
+          <a:solidFill>
+            <a:srgbClr val="F4F4F4"/>
+          </a:solidFill>
+        </p:spPr>
+        <p:txBody>
+          <a:bodyPr wrap="square">
+            <a:noAutofit/>
+          </a:bodyPr>
+          <a:lstStyle/>
+          <a:p>
+            <a:pPr>
+              <a:lnSpc>
+                <a:spcPts val="2200"/>
+              </a:lnSpc>
+              <a:spcAft>
+                <a:spcPts val="400"/>
+              </a:spcAft>
+              <a:defRPr sz="2000" b="0">
+                <a:solidFill>
+                  <a:srgbClr val="333333"/>
+                </a:solidFill>
+                <a:latin typeface="Consolas"/>
+              </a:defRPr>
+            </a:pPr>
+            <a:r>
+              <a:t># Makefile for Module 7 I2C baseline (basic testbench, no UVM)</a:t>
+            </a:r>
+          </a:p>
+          <a:p>
+            <a:pPr>
+              <a:lnSpc>
+                <a:spcPts val="2200"/>
+              </a:lnSpc>
+              <a:spcAft>
+                <a:spcPts val="400"/>
+              </a:spcAft>
+              <a:defRPr sz="2000" b="0">
+                <a:solidFill>
+                  <a:srgbClr val="333333"/>
+                </a:solidFill>
+                <a:latin typeface="Consolas"/>
+              </a:defRPr>
+            </a:pPr>
+            <a:r>
+              <a:t>#</a:t>
+            </a:r>
+          </a:p>
+          <a:p>
+            <a:pPr>
+              <a:lnSpc>
+                <a:spcPts val="2200"/>
+              </a:lnSpc>
+              <a:spcAft>
+                <a:spcPts val="400"/>
+              </a:spcAft>
+              <a:defRPr sz="2000" b="0">
+                <a:solidFill>
+                  <a:srgbClr val="333333"/>
+                </a:solidFill>
+                <a:latin typeface="Consolas"/>
+              </a:defRPr>
+            </a:pPr>
+            <a:r>
+              <a:t># Usage:</a:t>
+            </a:r>
+          </a:p>
+          <a:p>
+            <a:pPr>
+              <a:lnSpc>
+                <a:spcPts val="2200"/>
+              </a:lnSpc>
+              <a:spcAft>
+                <a:spcPts val="400"/>
+              </a:spcAft>
+              <a:defRPr sz="2000" b="0">
+                <a:solidFill>
+                  <a:srgbClr val="333333"/>
+                </a:solidFill>
+                <a:latin typeface="Consolas"/>
+              </a:defRPr>
+            </a:pPr>
+            <a:r>
+              <a:t>#   make run</a:t>
+            </a:r>
+          </a:p>
+          <a:p>
+            <a:pPr>
+              <a:lnSpc>
+                <a:spcPts val="2200"/>
+              </a:lnSpc>
+              <a:spcAft>
+                <a:spcPts val="400"/>
+              </a:spcAft>
+              <a:defRPr sz="2000" b="0">
+                <a:solidFill>
+                  <a:srgbClr val="333333"/>
+                </a:solidFill>
+                <a:latin typeface="Consolas"/>
+              </a:defRPr>
+            </a:pPr>
+            <a:r>
+              <a:t>#</a:t>
+            </a:r>
+          </a:p>
+          <a:p>
+            <a:pPr>
+              <a:lnSpc>
+                <a:spcPts val="2200"/>
+              </a:lnSpc>
+              <a:spcAft>
+                <a:spcPts val="400"/>
+              </a:spcAft>
+              <a:defRPr sz="2000" b="0">
+                <a:solidFill>
+                  <a:srgbClr val="333333"/>
+                </a:solidFill>
+                <a:latin typeface="Consolas"/>
+              </a:defRPr>
+            </a:pPr>
+          </a:p>
+          <a:p>
+            <a:pPr>
+              <a:lnSpc>
+                <a:spcPts val="2200"/>
+              </a:lnSpc>
+              <a:spcAft>
+                <a:spcPts val="400"/>
+              </a:spcAft>
+              <a:defRPr sz="2000" b="0">
+                <a:solidFill>
+                  <a:srgbClr val="333333"/>
+                </a:solidFill>
+                <a:latin typeface="Consolas"/>
+              </a:defRPr>
+            </a:pPr>
+            <a:r>
+              <a:t>VERILATOR ?= verilator</a:t>
+            </a:r>
+          </a:p>
+          <a:p>
+            <a:pPr>
+              <a:lnSpc>
+                <a:spcPts val="2200"/>
+              </a:lnSpc>
+              <a:spcAft>
+                <a:spcPts val="400"/>
+              </a:spcAft>
+              <a:defRPr sz="2000" b="0">
+                <a:solidFill>
+                  <a:srgbClr val="333333"/>
+                </a:solidFill>
+                <a:latin typeface="Consolas"/>
+              </a:defRPr>
+            </a:pPr>
+            <a:r>
+              <a:t>TOPLEVEL ?= top_i2c_baseline</a:t>
+            </a:r>
+          </a:p>
+          <a:p>
+            <a:pPr>
+              <a:lnSpc>
+                <a:spcPts val="2200"/>
+              </a:lnSpc>
+              <a:spcAft>
+                <a:spcPts val="400"/>
+              </a:spcAft>
+              <a:defRPr sz="2000" b="0">
+                <a:solidFill>
+                  <a:srgbClr val="333333"/>
+                </a:solidFill>
+                <a:latin typeface="Consolas"/>
+              </a:defRPr>
+            </a:pPr>
+            <a:r>
+              <a:t>DUT_SRC = dut/*.v</a:t>
+            </a:r>
+          </a:p>
+          <a:p>
+            <a:pPr>
+              <a:lnSpc>
+                <a:spcPts val="2200"/>
+              </a:lnSpc>
+              <a:spcAft>
+                <a:spcPts val="400"/>
+              </a:spcAft>
+              <a:defRPr sz="2000" b="0">
+                <a:solidFill>
+                  <a:srgbClr val="333333"/>
+                </a:solidFill>
+                <a:latin typeface="Consolas"/>
+              </a:defRPr>
+            </a:pPr>
+            <a:r>
+              <a:t>RTL_SRC = top_i2c_baseline.sv $(DUT_SRC)</a:t>
+            </a:r>
+          </a:p>
+          <a:p>
+            <a:pPr>
+              <a:lnSpc>
+                <a:spcPts val="2200"/>
+              </a:lnSpc>
+              <a:spcAft>
+                <a:spcPts val="400"/>
+              </a:spcAft>
+              <a:defRPr sz="2000" b="0">
+                <a:solidFill>
+                  <a:srgbClr val="333333"/>
+                </a:solidFill>
+                <a:latin typeface="Consolas"/>
+              </a:defRPr>
+            </a:pPr>
+            <a:r>
+              <a:t>HARNESS = sim_main.cpp</a:t>
+            </a:r>
+          </a:p>
+          <a:p>
+            <a:pPr>
+              <a:lnSpc>
+                <a:spcPts val="2200"/>
+              </a:lnSpc>
+              <a:spcAft>
+                <a:spcPts val="400"/>
+              </a:spcAft>
+              <a:defRPr sz="2000" b="0">
+                <a:solidFill>
+                  <a:srgbClr val="333333"/>
+                </a:solidFill>
+                <a:latin typeface="Consolas"/>
+              </a:defRPr>
+            </a:pPr>
+          </a:p>
+          <a:p>
+            <a:pPr>
+              <a:lnSpc>
+                <a:spcPts val="2200"/>
+              </a:lnSpc>
+              <a:spcAft>
+                <a:spcPts val="400"/>
+              </a:spcAft>
+              <a:defRPr sz="2000" b="0">
+                <a:solidFill>
+                  <a:srgbClr val="333333"/>
+                </a:solidFill>
+                <a:latin typeface="Consolas"/>
+              </a:defRPr>
+            </a:pPr>
+            <a:r>
+              <a:t>VERILATOR_FLAGS = -sv --timing -Wall -Wno-fatal -Wno-TIMESCALEMOD -Wno-</a:t>
+            </a:r>
+          </a:p>
+          <a:p>
+            <a:pPr>
+              <a:lnSpc>
+                <a:spcPts val="2200"/>
+              </a:lnSpc>
+              <a:spcAft>
+                <a:spcPts val="400"/>
+              </a:spcAft>
+              <a:defRPr sz="2000" b="0">
+                <a:solidFill>
+                  <a:srgbClr val="333333"/>
+                </a:solidFill>
+                <a:latin typeface="Consolas"/>
+              </a:defRPr>
+            </a:pPr>
+            <a:r>
+              <a:t>WIDTHTRUNC</a:t>
+            </a:r>
+          </a:p>
+          <a:p>
+            <a:pPr>
+              <a:lnSpc>
+                <a:spcPts val="2200"/>
+              </a:lnSpc>
+              <a:spcAft>
+                <a:spcPts val="400"/>
+              </a:spcAft>
+              <a:defRPr sz="2000" b="0">
+                <a:solidFill>
+                  <a:srgbClr val="333333"/>
+                </a:solidFill>
+                <a:latin typeface="Consolas"/>
+              </a:defRPr>
+            </a:pPr>
+          </a:p>
+          <a:p>
+            <a:pPr>
+              <a:lnSpc>
+                <a:spcPts val="2200"/>
+              </a:lnSpc>
+              <a:spcAft>
+                <a:spcPts val="400"/>
+              </a:spcAft>
+              <a:defRPr sz="2000" b="0">
+                <a:solidFill>
+                  <a:srgbClr val="333333"/>
+                </a:solidFill>
+                <a:latin typeface="Consolas"/>
+              </a:defRPr>
+            </a:pPr>
+            <a:r>
+              <a:t>.PHONY: run compile clean</a:t>
+            </a:r>
+          </a:p>
+          <a:p>
+            <a:pPr>
+              <a:lnSpc>
+                <a:spcPts val="2200"/>
+              </a:lnSpc>
+              <a:spcAft>
+                <a:spcPts val="400"/>
+              </a:spcAft>
+              <a:defRPr sz="2000" b="0">
+                <a:solidFill>
+                  <a:srgbClr val="333333"/>
+                </a:solidFill>
+                <a:latin typeface="Consolas"/>
+              </a:defRPr>
+            </a:pPr>
+          </a:p>
+          <a:p>
+            <a:pPr>
+              <a:lnSpc>
+                <a:spcPts val="2200"/>
+              </a:lnSpc>
+              <a:spcAft>
+                <a:spcPts val="400"/>
+              </a:spcAft>
+              <a:defRPr sz="2000" b="0">
+                <a:solidFill>
+                  <a:srgbClr val="333333"/>
+                </a:solidFill>
+                <a:latin typeface="Consolas"/>
+              </a:defRPr>
+            </a:pPr>
+            <a:r>
+              <a:t># ...</a:t>
+            </a:r>
+          </a:p>
+        </p:txBody>
+      </p:sp>
+      <p:sp>
+        <p:nvSpPr>
+          <p:cNvPr id="4" name="TextBox 3"/>
           <p:cNvSpPr txBox="1"/>
           <p:nvPr/>
         </p:nvSpPr>
@@ -6174,8 +7944,8 @@
         </p:nvSpPr>
         <p:spPr>
           <a:xfrm>
-            <a:off x="548640" y="411480"/>
-            <a:ext cx="11064240" cy="777240"/>
+            <a:off x="548640" y="2743200"/>
+            <a:ext cx="11064240" cy="1371600"/>
           </a:xfrm>
           <a:prstGeom prst="rect">
             <a:avLst/>
@@ -6188,11 +7958,11 @@
           </a:bodyPr>
           <a:lstStyle/>
           <a:p>
-            <a:pPr>
-              <a:lnSpc>
-                <a:spcPts val="2200"/>
-              </a:lnSpc>
-              <a:defRPr sz="2800" b="1">
+            <a:pPr algn="ctr">
+              <a:lnSpc>
+                <a:spcPts val="2200"/>
+              </a:lnSpc>
+              <a:defRPr sz="3600" b="1">
                 <a:solidFill>
                   <a:srgbClr val="1A1A2E"/>
                 </a:solidFill>
@@ -6200,7 +7970,7 @@
               </a:defRPr>
             </a:pPr>
             <a:r>
-              <a:t>1. I²C Protocol Essentials</a:t>
+              <a:t>Key files to study</a:t>
             </a:r>
           </a:p>
         </p:txBody>
@@ -6208,181 +7978,6 @@
       <p:sp>
         <p:nvSpPr>
           <p:cNvPr id="3" name="TextBox 2"/>
-          <p:cNvSpPr txBox="1"/>
-          <p:nvPr/>
-        </p:nvSpPr>
-        <p:spPr>
-          <a:xfrm>
-            <a:off x="548640" y="1234440"/>
-            <a:ext cx="11064240" cy="4937760"/>
-          </a:xfrm>
-          <a:prstGeom prst="rect">
-            <a:avLst/>
-          </a:prstGeom>
-          <a:noFill/>
-        </p:spPr>
-        <p:txBody>
-          <a:bodyPr wrap="square">
-            <a:noAutofit/>
-          </a:bodyPr>
-          <a:lstStyle/>
-          <a:p>
-            <a:pPr>
-              <a:lnSpc>
-                <a:spcPts val="2200"/>
-              </a:lnSpc>
-              <a:spcAft>
-                <a:spcPts val="1000"/>
-              </a:spcAft>
-              <a:defRPr sz="2000" b="0">
-                <a:solidFill>
-                  <a:srgbClr val="333333"/>
-                </a:solidFill>
-                <a:latin typeface="Calibri"/>
-              </a:defRPr>
-            </a:pPr>
-            <a:r>
-              <a:t>• Bus idle: SCL=1, SDA=1.</a:t>
-            </a:r>
-          </a:p>
-          <a:p>
-            <a:pPr>
-              <a:lnSpc>
-                <a:spcPts val="2200"/>
-              </a:lnSpc>
-              <a:spcAft>
-                <a:spcPts val="1000"/>
-              </a:spcAft>
-              <a:defRPr sz="2000" b="0">
-                <a:solidFill>
-                  <a:srgbClr val="333333"/>
-                </a:solidFill>
-                <a:latin typeface="Calibri"/>
-              </a:defRPr>
-            </a:pPr>
-            <a:r>
-              <a:t>• START: SDA goes 1→0 while SCL is 1.</a:t>
-            </a:r>
-          </a:p>
-          <a:p>
-            <a:pPr>
-              <a:lnSpc>
-                <a:spcPts val="2200"/>
-              </a:lnSpc>
-              <a:spcAft>
-                <a:spcPts val="1000"/>
-              </a:spcAft>
-              <a:defRPr sz="2000" b="0">
-                <a:solidFill>
-                  <a:srgbClr val="333333"/>
-                </a:solidFill>
-                <a:latin typeface="Calibri"/>
-              </a:defRPr>
-            </a:pPr>
-            <a:r>
-              <a:t>• STOP: SDA goes 0→1 while SCL is 1.</a:t>
-            </a:r>
-          </a:p>
-          <a:p>
-            <a:pPr>
-              <a:lnSpc>
-                <a:spcPts val="2200"/>
-              </a:lnSpc>
-              <a:spcAft>
-                <a:spcPts val="1000"/>
-              </a:spcAft>
-              <a:defRPr sz="2000" b="0">
-                <a:solidFill>
-                  <a:srgbClr val="333333"/>
-                </a:solidFill>
-                <a:latin typeface="Calibri"/>
-              </a:defRPr>
-            </a:pPr>
-            <a:r>
-              <a:t>• Address phase: 7-bit address + R/W bit (0=write,</a:t>
-            </a:r>
-          </a:p>
-          <a:p>
-            <a:pPr>
-              <a:lnSpc>
-                <a:spcPts val="2200"/>
-              </a:lnSpc>
-              <a:spcAft>
-                <a:spcPts val="1000"/>
-              </a:spcAft>
-              <a:defRPr sz="2000" b="0">
-                <a:solidFill>
-                  <a:srgbClr val="333333"/>
-                </a:solidFill>
-                <a:latin typeface="Calibri"/>
-              </a:defRPr>
-            </a:pPr>
-            <a:r>
-              <a:t>      1=read) sent MSB first.</a:t>
-            </a:r>
-          </a:p>
-          <a:p>
-            <a:pPr>
-              <a:lnSpc>
-                <a:spcPts val="2200"/>
-              </a:lnSpc>
-              <a:spcAft>
-                <a:spcPts val="1000"/>
-              </a:spcAft>
-              <a:defRPr sz="2000" b="0">
-                <a:solidFill>
-                  <a:srgbClr val="333333"/>
-                </a:solidFill>
-                <a:latin typeface="Calibri"/>
-              </a:defRPr>
-            </a:pPr>
-            <a:r>
-              <a:t>• Data phase: 8-bit data bytes sent MSB first.</a:t>
-            </a:r>
-          </a:p>
-          <a:p>
-            <a:pPr>
-              <a:lnSpc>
-                <a:spcPts val="2200"/>
-              </a:lnSpc>
-              <a:spcAft>
-                <a:spcPts val="1000"/>
-              </a:spcAft>
-              <a:defRPr sz="2000" b="0">
-                <a:solidFill>
-                  <a:srgbClr val="333333"/>
-                </a:solidFill>
-                <a:latin typeface="Calibri"/>
-              </a:defRPr>
-            </a:pPr>
-            <a:r>
-              <a:t>• ACK/NACK (concept): receiver pulls SDA low for ACK</a:t>
-            </a:r>
-          </a:p>
-          <a:p>
-            <a:pPr>
-              <a:lnSpc>
-                <a:spcPts val="2200"/>
-              </a:lnSpc>
-              <a:spcAft>
-                <a:spcPts val="1000"/>
-              </a:spcAft>
-              <a:defRPr sz="2000" b="0">
-                <a:solidFill>
-                  <a:srgbClr val="333333"/>
-                </a:solidFill>
-                <a:latin typeface="Calibri"/>
-              </a:defRPr>
-            </a:pPr>
-            <a:r>
-              <a:t>      on the 9th clock; high means NACK.</a:t>
-            </a:r>
-          </a:p>
-        </p:txBody>
-      </p:sp>
-      <p:sp>
-        <p:nvSpPr>
-          <p:cNvPr id="4" name="TextBox 3"/>
           <p:cNvSpPr txBox="1"/>
           <p:nvPr/>
         </p:nvSpPr>
@@ -6471,7 +8066,7 @@
               </a:defRPr>
             </a:pPr>
             <a:r>
-              <a:t>2. Hands-on testbench (i2c_baseline)</a:t>
+              <a:t>Open these in the repo</a:t>
             </a:r>
           </a:p>
         </p:txBody>
@@ -6513,7 +8108,7 @@
               </a:defRPr>
             </a:pPr>
             <a:r>
-              <a:t>• Stimulus: `start`, `addr`, `data_in`, `wait(done)`.</a:t>
+              <a:t>• `module7/examples/i2c_baseline/dut/i2c_master.v` —</a:t>
             </a:r>
           </a:p>
           <a:p>
@@ -6532,7 +8127,7 @@
               </a:defRPr>
             </a:pPr>
             <a:r>
-              <a:t>• Monitor/self-check: reconstruct address+W and data</a:t>
+              <a:t>      START/addr/data/STOP FSM</a:t>
             </a:r>
           </a:p>
           <a:p>
@@ -6551,7 +8146,45 @@
               </a:defRPr>
             </a:pPr>
             <a:r>
-              <a:t>      from SCL/SDA; compare to expected.</a:t>
+              <a:t>• `module7/examples/i2c_baseline/top_i2c_baseline.sv`</a:t>
+            </a:r>
+          </a:p>
+          <a:p>
+            <a:pPr>
+              <a:lnSpc>
+                <a:spcPts val="2200"/>
+              </a:lnSpc>
+              <a:spcAft>
+                <a:spcPts val="1000"/>
+              </a:spcAft>
+              <a:defRPr sz="2000" b="0">
+                <a:solidFill>
+                  <a:srgbClr val="333333"/>
+                </a:solidFill>
+                <a:latin typeface="Calibri"/>
+              </a:defRPr>
+            </a:pPr>
+            <a:r>
+              <a:t>      — stimulus + inline bus monitor</a:t>
+            </a:r>
+          </a:p>
+          <a:p>
+            <a:pPr>
+              <a:lnSpc>
+                <a:spcPts val="2200"/>
+              </a:lnSpc>
+              <a:spcAft>
+                <a:spcPts val="1000"/>
+              </a:spcAft>
+              <a:defRPr sz="2000" b="0">
+                <a:solidFill>
+                  <a:srgbClr val="333333"/>
+                </a:solidFill>
+                <a:latin typeface="Calibri"/>
+              </a:defRPr>
+            </a:pPr>
+            <a:r>
+              <a:t>• `docs/I2C_LEARNING_GUIDE.md` — protocol reference</a:t>
             </a:r>
           </a:p>
         </p:txBody>
@@ -6647,7 +8280,7 @@
               </a:defRPr>
             </a:pPr>
             <a:r>
-              <a:t>Hands-on examples</a:t>
+              <a:t>Verification &amp; testing methods</a:t>
             </a:r>
           </a:p>
         </p:txBody>
@@ -6743,7 +8376,7 @@
               </a:defRPr>
             </a:pPr>
             <a:r>
-              <a:t>Module 7 self-check</a:t>
+              <a:t>1. Inline bus monitor</a:t>
             </a:r>
           </a:p>
         </p:txBody>
@@ -6756,15 +8389,13 @@
         </p:nvSpPr>
         <p:spPr>
           <a:xfrm>
-            <a:off x="548640" y="1051560"/>
-            <a:ext cx="11064240" cy="914400"/>
+            <a:off x="548640" y="1234440"/>
+            <a:ext cx="5303520" cy="4754880"/>
           </a:xfrm>
           <a:prstGeom prst="rect">
             <a:avLst/>
           </a:prstGeom>
-          <a:solidFill>
-            <a:srgbClr val="F4F4F4"/>
-          </a:solidFill>
+          <a:noFill/>
         </p:spPr>
         <p:txBody>
           <a:bodyPr wrap="square">
@@ -6777,24 +8408,62 @@
                 <a:spcPts val="2200"/>
               </a:lnSpc>
               <a:spcAft>
-                <a:spcPts val="200"/>
-              </a:spcAft>
-              <a:defRPr sz="2000" b="0">
-                <a:solidFill>
-                  <a:srgbClr val="333333"/>
-                </a:solidFill>
-                <a:latin typeface="Consolas"/>
-              </a:defRPr>
-            </a:pPr>
-            <a:r>
-              <a:t>$ ./scripts/module7.sh --help</a:t>
+                <a:spcPts val="1000"/>
+              </a:spcAft>
+              <a:defRPr sz="2000" b="0">
+                <a:solidFill>
+                  <a:srgbClr val="333333"/>
+                </a:solidFill>
+                <a:latin typeface="Calibri"/>
+              </a:defRPr>
+            </a:pPr>
+            <a:r>
+              <a:t>• Top module detects START;</a:t>
+            </a:r>
+          </a:p>
+          <a:p>
+            <a:pPr>
+              <a:lnSpc>
+                <a:spcPts val="2200"/>
+              </a:lnSpc>
+              <a:spcAft>
+                <a:spcPts val="1000"/>
+              </a:spcAft>
+              <a:defRPr sz="2000" b="0">
+                <a:solidFill>
+                  <a:srgbClr val="333333"/>
+                </a:solidFill>
+                <a:latin typeface="Calibri"/>
+              </a:defRPr>
+            </a:pPr>
+            <a:r>
+              <a:t>      samples SDA on rising SCL;</a:t>
+            </a:r>
+          </a:p>
+          <a:p>
+            <a:pPr>
+              <a:lnSpc>
+                <a:spcPts val="2200"/>
+              </a:lnSpc>
+              <a:spcAft>
+                <a:spcPts val="1000"/>
+              </a:spcAft>
+              <a:defRPr sz="2000" b="0">
+                <a:solidFill>
+                  <a:srgbClr val="333333"/>
+                </a:solidFill>
+                <a:latin typeface="Calibri"/>
+              </a:defRPr>
+            </a:pPr>
+            <a:r>
+              <a:t>      rebuilds addr+W and data.</a:t>
             </a:r>
           </a:p>
         </p:txBody>
       </p:sp>
       <p:pic>
         <p:nvPicPr>
-          <p:cNvPr id="4" name="Picture 3" descr="module7_check.png"/>
+          <p:cNvPr id="4" name="Picture 3" descr="testing_methods.png"/>
           <p:cNvPicPr>
             <a:picLocks noChangeAspect="1"/>
           </p:cNvPicPr>
@@ -6808,8 +8477,8 @@
         </p:blipFill>
         <p:spPr>
           <a:xfrm>
-            <a:off x="548640" y="1965960"/>
-            <a:ext cx="7071358" cy="3977639"/>
+            <a:off x="6172200" y="2094547"/>
+            <a:ext cx="5394960" cy="3034665"/>
           </a:xfrm>
           <a:prstGeom prst="rect">
             <a:avLst/>
@@ -6907,7 +8576,7 @@
               </a:defRPr>
             </a:pPr>
             <a:r>
-              <a:t>Example 1: I²C baseline</a:t>
+              <a:t>2. Self-check flow</a:t>
             </a:r>
           </a:p>
         </p:txBody>
@@ -6921,7 +8590,7 @@
         <p:spPr>
           <a:xfrm>
             <a:off x="548640" y="1234440"/>
-            <a:ext cx="11064240" cy="4937760"/>
+            <a:ext cx="5303520" cy="4754880"/>
           </a:xfrm>
           <a:prstGeom prst="rect">
             <a:avLst/>
@@ -6949,7 +8618,7 @@
               </a:defRPr>
             </a:pPr>
             <a:r>
-              <a:t>• Drives a single write transaction (START → address+W</a:t>
+              <a:t>• Compare captured bytes to driven</a:t>
             </a:r>
           </a:p>
           <a:p>
@@ -6968,7 +8637,7 @@
               </a:defRPr>
             </a:pPr>
             <a:r>
-              <a:t>      → data → STOP)</a:t>
+              <a:t>      `addr`/`data_in`; print `I2C</a:t>
             </a:r>
           </a:p>
           <a:p>
@@ -6987,52 +8656,38 @@
               </a:defRPr>
             </a:pPr>
             <a:r>
-              <a:t>• Includes a simple bus monitor that samples SDA on</a:t>
-            </a:r>
-          </a:p>
-          <a:p>
-            <a:pPr>
-              <a:lnSpc>
-                <a:spcPts val="2200"/>
-              </a:lnSpc>
-              <a:spcAft>
-                <a:spcPts val="1000"/>
-              </a:spcAft>
-              <a:defRPr sz="2000" b="0">
-                <a:solidFill>
-                  <a:srgbClr val="333333"/>
-                </a:solidFill>
-                <a:latin typeface="Calibri"/>
-              </a:defRPr>
-            </a:pPr>
-            <a:r>
-              <a:t>      SCL rising edges to reconstruct bytes</a:t>
-            </a:r>
-          </a:p>
-          <a:p>
-            <a:pPr>
-              <a:lnSpc>
-                <a:spcPts val="2200"/>
-              </a:lnSpc>
-              <a:spcAft>
-                <a:spcPts val="1000"/>
-              </a:spcAft>
-              <a:defRPr sz="2000" b="0">
-                <a:solidFill>
-                  <a:srgbClr val="333333"/>
-                </a:solidFill>
-                <a:latin typeface="Calibri"/>
-              </a:defRPr>
-            </a:pPr>
-            <a:r>
-              <a:t>• No UVM</a:t>
-            </a:r>
-          </a:p>
-        </p:txBody>
-      </p:sp>
-      <p:sp>
-        <p:nvSpPr>
-          <p:cNvPr id="4" name="TextBox 3"/>
+              <a:t>      baseline test PASS`.</a:t>
+            </a:r>
+          </a:p>
+        </p:txBody>
+      </p:sp>
+      <p:pic>
+        <p:nvPicPr>
+          <p:cNvPr id="4" name="Picture 3" descr="testing_methods.png"/>
+          <p:cNvPicPr>
+            <a:picLocks noChangeAspect="1"/>
+          </p:cNvPicPr>
+          <p:nvPr/>
+        </p:nvPicPr>
+        <p:blipFill>
+          <a:blip r:embed="rId2"/>
+          <a:stretch>
+            <a:fillRect/>
+          </a:stretch>
+        </p:blipFill>
+        <p:spPr>
+          <a:xfrm>
+            <a:off x="6172200" y="2094547"/>
+            <a:ext cx="5394960" cy="3034665"/>
+          </a:xfrm>
+          <a:prstGeom prst="rect">
+            <a:avLst/>
+          </a:prstGeom>
+        </p:spPr>
+      </p:pic>
+      <p:sp>
+        <p:nvSpPr>
+          <p:cNvPr id="5" name="TextBox 4"/>
           <p:cNvSpPr txBox="1"/>
           <p:nvPr/>
         </p:nvSpPr>
@@ -7121,7 +8776,7 @@
               </a:defRPr>
             </a:pPr>
             <a:r>
-              <a:t>Demo: I²C baseline</a:t>
+              <a:t>3. Path to Module 8</a:t>
             </a:r>
           </a:p>
         </p:txBody>
@@ -7134,15 +8789,13 @@
         </p:nvSpPr>
         <p:spPr>
           <a:xfrm>
-            <a:off x="548640" y="1051560"/>
-            <a:ext cx="11064240" cy="914400"/>
+            <a:off x="548640" y="1234440"/>
+            <a:ext cx="5303520" cy="4754880"/>
           </a:xfrm>
           <a:prstGeom prst="rect">
             <a:avLst/>
           </a:prstGeom>
-          <a:solidFill>
-            <a:srgbClr val="F4F4F4"/>
-          </a:solidFill>
+          <a:noFill/>
         </p:spPr>
         <p:txBody>
           <a:bodyPr wrap="square">
@@ -7155,24 +8808,62 @@
                 <a:spcPts val="2200"/>
               </a:lnSpc>
               <a:spcAft>
-                <a:spcPts val="200"/>
-              </a:spcAft>
-              <a:defRPr sz="2000" b="0">
-                <a:solidFill>
-                  <a:srgbClr val="333333"/>
-                </a:solidFill>
-                <a:latin typeface="Consolas"/>
-              </a:defRPr>
-            </a:pPr>
-            <a:r>
-              <a:t>$ ./scripts/module7.sh --run</a:t>
+                <a:spcPts val="1000"/>
+              </a:spcAft>
+              <a:defRPr sz="2000" b="0">
+                <a:solidFill>
+                  <a:srgbClr val="333333"/>
+                </a:solidFill>
+                <a:latin typeface="Calibri"/>
+              </a:defRPr>
+            </a:pPr>
+            <a:r>
+              <a:t>• Move monitor into I2cMonitor;</a:t>
+            </a:r>
+          </a:p>
+          <a:p>
+            <a:pPr>
+              <a:lnSpc>
+                <a:spcPts val="2200"/>
+              </a:lnSpc>
+              <a:spcAft>
+                <a:spcPts val="1000"/>
+              </a:spcAft>
+              <a:defRPr sz="2000" b="0">
+                <a:solidFill>
+                  <a:srgbClr val="333333"/>
+                </a:solidFill>
+                <a:latin typeface="Calibri"/>
+              </a:defRPr>
+            </a:pPr>
+            <a:r>
+              <a:t>      scoreboard splits address and</a:t>
+            </a:r>
+          </a:p>
+          <a:p>
+            <a:pPr>
+              <a:lnSpc>
+                <a:spcPts val="2200"/>
+              </a:lnSpc>
+              <a:spcAft>
+                <a:spcPts val="1000"/>
+              </a:spcAft>
+              <a:defRPr sz="2000" b="0">
+                <a:solidFill>
+                  <a:srgbClr val="333333"/>
+                </a:solidFill>
+                <a:latin typeface="Calibri"/>
+              </a:defRPr>
+            </a:pPr>
+            <a:r>
+              <a:t>      data phases.</a:t>
             </a:r>
           </a:p>
         </p:txBody>
       </p:sp>
       <p:pic>
         <p:nvPicPr>
-          <p:cNvPr id="4" name="Picture 3" descr="i2c_baseline.png"/>
+          <p:cNvPr id="4" name="Picture 3" descr="testing_methods.png"/>
           <p:cNvPicPr>
             <a:picLocks noChangeAspect="1"/>
           </p:cNvPicPr>
@@ -7186,8 +8877,8 @@
         </p:blipFill>
         <p:spPr>
           <a:xfrm>
-            <a:off x="548640" y="1965960"/>
-            <a:ext cx="7071358" cy="3977639"/>
+            <a:off x="6172200" y="2094547"/>
+            <a:ext cx="5394960" cy="3034665"/>
           </a:xfrm>
           <a:prstGeom prst="rect">
             <a:avLst/>
@@ -7259,8 +8950,8 @@
         </p:nvSpPr>
         <p:spPr>
           <a:xfrm>
-            <a:off x="548640" y="2743200"/>
-            <a:ext cx="11064240" cy="1371600"/>
+            <a:off x="548640" y="411480"/>
+            <a:ext cx="11064240" cy="777240"/>
           </a:xfrm>
           <a:prstGeom prst="rect">
             <a:avLst/>
@@ -7273,11 +8964,11 @@
           </a:bodyPr>
           <a:lstStyle/>
           <a:p>
-            <a:pPr algn="ctr">
-              <a:lnSpc>
-                <a:spcPts val="2200"/>
-              </a:lnSpc>
-              <a:defRPr sz="3600" b="1">
+            <a:pPr>
+              <a:lnSpc>
+                <a:spcPts val="2200"/>
+              </a:lnSpc>
+              <a:defRPr sz="2800" b="1">
                 <a:solidFill>
                   <a:srgbClr val="1A1A2E"/>
                 </a:solidFill>
@@ -7285,7 +8976,7 @@
               </a:defRPr>
             </a:pPr>
             <a:r>
-              <a:t>Practice &amp; assessment</a:t>
+              <a:t>Directed I2C test</a:t>
             </a:r>
           </a:p>
         </p:txBody>
@@ -7293,6 +8984,364 @@
       <p:sp>
         <p:nvSpPr>
           <p:cNvPr id="3" name="TextBox 2"/>
+          <p:cNvSpPr txBox="1"/>
+          <p:nvPr/>
+        </p:nvSpPr>
+        <p:spPr>
+          <a:xfrm>
+            <a:off x="548640" y="1143000"/>
+            <a:ext cx="11064240" cy="5029200"/>
+          </a:xfrm>
+          <a:prstGeom prst="rect">
+            <a:avLst/>
+          </a:prstGeom>
+          <a:solidFill>
+            <a:srgbClr val="F4F4F4"/>
+          </a:solidFill>
+        </p:spPr>
+        <p:txBody>
+          <a:bodyPr wrap="square">
+            <a:noAutofit/>
+          </a:bodyPr>
+          <a:lstStyle/>
+          <a:p>
+            <a:pPr>
+              <a:lnSpc>
+                <a:spcPts val="2200"/>
+              </a:lnSpc>
+              <a:spcAft>
+                <a:spcPts val="400"/>
+              </a:spcAft>
+              <a:defRPr sz="2000" b="0">
+                <a:solidFill>
+                  <a:srgbClr val="333333"/>
+                </a:solidFill>
+                <a:latin typeface="Consolas"/>
+              </a:defRPr>
+            </a:pPr>
+            <a:r>
+              <a:t>.data_in     (data_in),</a:t>
+            </a:r>
+          </a:p>
+          <a:p>
+            <a:pPr>
+              <a:lnSpc>
+                <a:spcPts val="2200"/>
+              </a:lnSpc>
+              <a:spcAft>
+                <a:spcPts val="400"/>
+              </a:spcAft>
+              <a:defRPr sz="2000" b="0">
+                <a:solidFill>
+                  <a:srgbClr val="333333"/>
+                </a:solidFill>
+                <a:latin typeface="Consolas"/>
+              </a:defRPr>
+            </a:pPr>
+            <a:r>
+              <a:t>        .scl         (scl),</a:t>
+            </a:r>
+          </a:p>
+          <a:p>
+            <a:pPr>
+              <a:lnSpc>
+                <a:spcPts val="2200"/>
+              </a:lnSpc>
+              <a:spcAft>
+                <a:spcPts val="400"/>
+              </a:spcAft>
+              <a:defRPr sz="2000" b="0">
+                <a:solidFill>
+                  <a:srgbClr val="333333"/>
+                </a:solidFill>
+                <a:latin typeface="Consolas"/>
+              </a:defRPr>
+            </a:pPr>
+            <a:r>
+              <a:t>        .sda         (sda),</a:t>
+            </a:r>
+          </a:p>
+          <a:p>
+            <a:pPr>
+              <a:lnSpc>
+                <a:spcPts val="2200"/>
+              </a:lnSpc>
+              <a:spcAft>
+                <a:spcPts val="400"/>
+              </a:spcAft>
+              <a:defRPr sz="2000" b="0">
+                <a:solidFill>
+                  <a:srgbClr val="333333"/>
+                </a:solidFill>
+                <a:latin typeface="Consolas"/>
+              </a:defRPr>
+            </a:pPr>
+            <a:r>
+              <a:t>        .busy        (busy),</a:t>
+            </a:r>
+          </a:p>
+          <a:p>
+            <a:pPr>
+              <a:lnSpc>
+                <a:spcPts val="2200"/>
+              </a:lnSpc>
+              <a:spcAft>
+                <a:spcPts val="400"/>
+              </a:spcAft>
+              <a:defRPr sz="2000" b="0">
+                <a:solidFill>
+                  <a:srgbClr val="333333"/>
+                </a:solidFill>
+                <a:latin typeface="Consolas"/>
+              </a:defRPr>
+            </a:pPr>
+            <a:r>
+              <a:t>        .done        (done)</a:t>
+            </a:r>
+          </a:p>
+          <a:p>
+            <a:pPr>
+              <a:lnSpc>
+                <a:spcPts val="2200"/>
+              </a:lnSpc>
+              <a:spcAft>
+                <a:spcPts val="400"/>
+              </a:spcAft>
+              <a:defRPr sz="2000" b="0">
+                <a:solidFill>
+                  <a:srgbClr val="333333"/>
+                </a:solidFill>
+                <a:latin typeface="Consolas"/>
+              </a:defRPr>
+            </a:pPr>
+            <a:r>
+              <a:t>    );</a:t>
+            </a:r>
+          </a:p>
+          <a:p>
+            <a:pPr>
+              <a:lnSpc>
+                <a:spcPts val="2200"/>
+              </a:lnSpc>
+              <a:spcAft>
+                <a:spcPts val="400"/>
+              </a:spcAft>
+              <a:defRPr sz="2000" b="0">
+                <a:solidFill>
+                  <a:srgbClr val="333333"/>
+                </a:solidFill>
+                <a:latin typeface="Consolas"/>
+              </a:defRPr>
+            </a:pPr>
+          </a:p>
+          <a:p>
+            <a:pPr>
+              <a:lnSpc>
+                <a:spcPts val="2200"/>
+              </a:lnSpc>
+              <a:spcAft>
+                <a:spcPts val="400"/>
+              </a:spcAft>
+              <a:defRPr sz="2000" b="0">
+                <a:solidFill>
+                  <a:srgbClr val="333333"/>
+                </a:solidFill>
+                <a:latin typeface="Consolas"/>
+              </a:defRPr>
+            </a:pPr>
+            <a:r>
+              <a:t>    // Monitor: detect START, then sample 8 address bits and 8 data</a:t>
+            </a:r>
+          </a:p>
+          <a:p>
+            <a:pPr>
+              <a:lnSpc>
+                <a:spcPts val="2200"/>
+              </a:lnSpc>
+              <a:spcAft>
+                <a:spcPts val="400"/>
+              </a:spcAft>
+              <a:defRPr sz="2000" b="0">
+                <a:solidFill>
+                  <a:srgbClr val="333333"/>
+                </a:solidFill>
+                <a:latin typeface="Consolas"/>
+              </a:defRPr>
+            </a:pPr>
+            <a:r>
+              <a:t>bits.</a:t>
+            </a:r>
+          </a:p>
+          <a:p>
+            <a:pPr>
+              <a:lnSpc>
+                <a:spcPts val="2200"/>
+              </a:lnSpc>
+              <a:spcAft>
+                <a:spcPts val="400"/>
+              </a:spcAft>
+              <a:defRPr sz="2000" b="0">
+                <a:solidFill>
+                  <a:srgbClr val="333333"/>
+                </a:solidFill>
+                <a:latin typeface="Consolas"/>
+              </a:defRPr>
+            </a:pPr>
+            <a:r>
+              <a:t>    initial begin : i2c_monitor</a:t>
+            </a:r>
+          </a:p>
+          <a:p>
+            <a:pPr>
+              <a:lnSpc>
+                <a:spcPts val="2200"/>
+              </a:lnSpc>
+              <a:spcAft>
+                <a:spcPts val="400"/>
+              </a:spcAft>
+              <a:defRPr sz="2000" b="0">
+                <a:solidFill>
+                  <a:srgbClr val="333333"/>
+                </a:solidFill>
+                <a:latin typeface="Consolas"/>
+              </a:defRPr>
+            </a:pPr>
+            <a:r>
+              <a:t>        int i;</a:t>
+            </a:r>
+          </a:p>
+          <a:p>
+            <a:pPr>
+              <a:lnSpc>
+                <a:spcPts val="2200"/>
+              </a:lnSpc>
+              <a:spcAft>
+                <a:spcPts val="400"/>
+              </a:spcAft>
+              <a:defRPr sz="2000" b="0">
+                <a:solidFill>
+                  <a:srgbClr val="333333"/>
+                </a:solidFill>
+                <a:latin typeface="Consolas"/>
+              </a:defRPr>
+            </a:pPr>
+            <a:r>
+              <a:t>        captured_addr_w = 8'h00;</a:t>
+            </a:r>
+          </a:p>
+          <a:p>
+            <a:pPr>
+              <a:lnSpc>
+                <a:spcPts val="2200"/>
+              </a:lnSpc>
+              <a:spcAft>
+                <a:spcPts val="400"/>
+              </a:spcAft>
+              <a:defRPr sz="2000" b="0">
+                <a:solidFill>
+                  <a:srgbClr val="333333"/>
+                </a:solidFill>
+                <a:latin typeface="Consolas"/>
+              </a:defRPr>
+            </a:pPr>
+            <a:r>
+              <a:t>        captured_data   = 8'h00;</a:t>
+            </a:r>
+          </a:p>
+          <a:p>
+            <a:pPr>
+              <a:lnSpc>
+                <a:spcPts val="2200"/>
+              </a:lnSpc>
+              <a:spcAft>
+                <a:spcPts val="400"/>
+              </a:spcAft>
+              <a:defRPr sz="2000" b="0">
+                <a:solidFill>
+                  <a:srgbClr val="333333"/>
+                </a:solidFill>
+                <a:latin typeface="Consolas"/>
+              </a:defRPr>
+            </a:pPr>
+          </a:p>
+          <a:p>
+            <a:pPr>
+              <a:lnSpc>
+                <a:spcPts val="2200"/>
+              </a:lnSpc>
+              <a:spcAft>
+                <a:spcPts val="400"/>
+              </a:spcAft>
+              <a:defRPr sz="2000" b="0">
+                <a:solidFill>
+                  <a:srgbClr val="333333"/>
+                </a:solidFill>
+                <a:latin typeface="Consolas"/>
+              </a:defRPr>
+            </a:pPr>
+            <a:r>
+              <a:t>        wait (rst_n === 1'b1);</a:t>
+            </a:r>
+          </a:p>
+          <a:p>
+            <a:pPr>
+              <a:lnSpc>
+                <a:spcPts val="2200"/>
+              </a:lnSpc>
+              <a:spcAft>
+                <a:spcPts val="400"/>
+              </a:spcAft>
+              <a:defRPr sz="2000" b="0">
+                <a:solidFill>
+                  <a:srgbClr val="333333"/>
+                </a:solidFill>
+                <a:latin typeface="Consolas"/>
+              </a:defRPr>
+            </a:pPr>
+          </a:p>
+          <a:p>
+            <a:pPr>
+              <a:lnSpc>
+                <a:spcPts val="2200"/>
+              </a:lnSpc>
+              <a:spcAft>
+                <a:spcPts val="400"/>
+              </a:spcAft>
+              <a:defRPr sz="2000" b="0">
+                <a:solidFill>
+                  <a:srgbClr val="333333"/>
+                </a:solidFill>
+                <a:latin typeface="Consolas"/>
+              </a:defRPr>
+            </a:pPr>
+            <a:r>
+              <a:t>        // START: SDA falls while SCL high</a:t>
+            </a:r>
+          </a:p>
+          <a:p>
+            <a:pPr>
+              <a:lnSpc>
+                <a:spcPts val="2200"/>
+              </a:lnSpc>
+              <a:spcAft>
+                <a:spcPts val="400"/>
+              </a:spcAft>
+              <a:defRPr sz="2000" b="0">
+                <a:solidFill>
+                  <a:srgbClr val="333333"/>
+                </a:solidFill>
+                <a:latin typeface="Consolas"/>
+              </a:defRPr>
+            </a:pPr>
+            <a:r>
+              <a:t># ...</a:t>
+            </a:r>
+          </a:p>
+        </p:txBody>
+      </p:sp>
+      <p:sp>
+        <p:nvSpPr>
+          <p:cNvPr id="4" name="TextBox 3"/>
           <p:cNvSpPr txBox="1"/>
           <p:nvPr/>
         </p:nvSpPr>
@@ -7355,8 +9404,8 @@
         </p:nvSpPr>
         <p:spPr>
           <a:xfrm>
-            <a:off x="548640" y="411480"/>
-            <a:ext cx="11064240" cy="777240"/>
+            <a:off x="548640" y="2743200"/>
+            <a:ext cx="11064240" cy="1371600"/>
           </a:xfrm>
           <a:prstGeom prst="rect">
             <a:avLst/>
@@ -7369,11 +9418,11 @@
           </a:bodyPr>
           <a:lstStyle/>
           <a:p>
-            <a:pPr>
-              <a:lnSpc>
-                <a:spcPts val="2200"/>
-              </a:lnSpc>
-              <a:defRPr sz="2800" b="1">
+            <a:pPr algn="ctr">
+              <a:lnSpc>
+                <a:spcPts val="2200"/>
+              </a:lnSpc>
+              <a:defRPr sz="3600" b="1">
                 <a:solidFill>
                   <a:srgbClr val="1A1A2E"/>
                 </a:solidFill>
@@ -7381,7 +9430,7 @@
               </a:defRPr>
             </a:pPr>
             <a:r>
-              <a:t>Exercises</a:t>
+              <a:t>Syllabus topics</a:t>
             </a:r>
           </a:p>
         </p:txBody>
@@ -7389,105 +9438,6 @@
       <p:sp>
         <p:nvSpPr>
           <p:cNvPr id="3" name="TextBox 2"/>
-          <p:cNvSpPr txBox="1"/>
-          <p:nvPr/>
-        </p:nvSpPr>
-        <p:spPr>
-          <a:xfrm>
-            <a:off x="548640" y="1234440"/>
-            <a:ext cx="11064240" cy="4937760"/>
-          </a:xfrm>
-          <a:prstGeom prst="rect">
-            <a:avLst/>
-          </a:prstGeom>
-          <a:noFill/>
-        </p:spPr>
-        <p:txBody>
-          <a:bodyPr wrap="square">
-            <a:noAutofit/>
-          </a:bodyPr>
-          <a:lstStyle/>
-          <a:p>
-            <a:pPr>
-              <a:lnSpc>
-                <a:spcPts val="2200"/>
-              </a:lnSpc>
-              <a:spcAft>
-                <a:spcPts val="1000"/>
-              </a:spcAft>
-              <a:defRPr sz="2000" b="0">
-                <a:solidFill>
-                  <a:srgbClr val="333333"/>
-                </a:solidFill>
-                <a:latin typeface="Calibri"/>
-              </a:defRPr>
-            </a:pPr>
-            <a:r>
-              <a:t>• Run i2c_baseline</a:t>
-            </a:r>
-          </a:p>
-          <a:p>
-            <a:pPr>
-              <a:lnSpc>
-                <a:spcPts val="2200"/>
-              </a:lnSpc>
-              <a:spcAft>
-                <a:spcPts val="1000"/>
-              </a:spcAft>
-              <a:defRPr sz="2000" b="0">
-                <a:solidFill>
-                  <a:srgbClr val="333333"/>
-                </a:solidFill>
-                <a:latin typeface="Calibri"/>
-              </a:defRPr>
-            </a:pPr>
-            <a:r>
-              <a:t>• Trace one transfer</a:t>
-            </a:r>
-          </a:p>
-          <a:p>
-            <a:pPr>
-              <a:lnSpc>
-                <a:spcPts val="2200"/>
-              </a:lnSpc>
-              <a:spcAft>
-                <a:spcPts val="1000"/>
-              </a:spcAft>
-              <a:defRPr sz="2000" b="0">
-                <a:solidFill>
-                  <a:srgbClr val="333333"/>
-                </a:solidFill>
-                <a:latin typeface="Calibri"/>
-              </a:defRPr>
-            </a:pPr>
-            <a:r>
-              <a:t>• Bus monitor</a:t>
-            </a:r>
-          </a:p>
-          <a:p>
-            <a:pPr>
-              <a:lnSpc>
-                <a:spcPts val="2200"/>
-              </a:lnSpc>
-              <a:spcAft>
-                <a:spcPts val="1000"/>
-              </a:spcAft>
-              <a:defRPr sz="2000" b="0">
-                <a:solidFill>
-                  <a:srgbClr val="333333"/>
-                </a:solidFill>
-                <a:latin typeface="Calibri"/>
-              </a:defRPr>
-            </a:pPr>
-            <a:r>
-              <a:t>• Optional: Waveforms</a:t>
-            </a:r>
-          </a:p>
-        </p:txBody>
-      </p:sp>
-      <p:sp>
-        <p:nvSpPr>
-          <p:cNvPr id="4" name="TextBox 3"/>
           <p:cNvSpPr txBox="1"/>
           <p:nvPr/>
         </p:nvSpPr>
@@ -7576,7 +9526,7 @@
               </a:defRPr>
             </a:pPr>
             <a:r>
-              <a:t>Assessment checklist</a:t>
+              <a:t>1. I²C Protocol Essentials</a:t>
             </a:r>
           </a:p>
         </p:txBody>
@@ -7618,7 +9568,7 @@
               </a:defRPr>
             </a:pPr>
             <a:r>
-              <a:t>• Can describe I²C START, STOP, address+R/W, and data</a:t>
+              <a:t>• Bus idle: SCL=1, SDA=1.</a:t>
             </a:r>
           </a:p>
           <a:p>
@@ -7637,7 +9587,7 @@
               </a:defRPr>
             </a:pPr>
             <a:r>
-              <a:t>      phase (and ACK/NACK concept).</a:t>
+              <a:t>• START: SDA goes 1→0 while SCL is 1.</a:t>
             </a:r>
           </a:p>
           <a:p>
@@ -7656,7 +9606,7 @@
               </a:defRPr>
             </a:pPr>
             <a:r>
-              <a:t>• Can explain the role of i2c_master and clk_div; know</a:t>
+              <a:t>• STOP: SDA goes 0→1 while SCL is 1.</a:t>
             </a:r>
           </a:p>
           <a:p>
@@ -7675,7 +9625,7 @@
               </a:defRPr>
             </a:pPr>
             <a:r>
-              <a:t>      the baseline uses push-pull (simplified).</a:t>
+              <a:t>• Address phase: 7-bit address + R/W bit (0=write,</a:t>
             </a:r>
           </a:p>
           <a:p>
@@ -7694,7 +9644,7 @@
               </a:defRPr>
             </a:pPr>
             <a:r>
-              <a:t>• Can run i2c_baseline and interpret the test result.</a:t>
+              <a:t>      1=read) sent MSB first.</a:t>
             </a:r>
           </a:p>
           <a:p>
@@ -7713,7 +9663,45 @@
               </a:defRPr>
             </a:pPr>
             <a:r>
-              <a:t>• Ready for Module 8: I²C UVM+SV verification.</a:t>
+              <a:t>• Data phase: 8-bit data bytes sent MSB first.</a:t>
+            </a:r>
+          </a:p>
+          <a:p>
+            <a:pPr>
+              <a:lnSpc>
+                <a:spcPts val="2200"/>
+              </a:lnSpc>
+              <a:spcAft>
+                <a:spcPts val="1000"/>
+              </a:spcAft>
+              <a:defRPr sz="2000" b="0">
+                <a:solidFill>
+                  <a:srgbClr val="333333"/>
+                </a:solidFill>
+                <a:latin typeface="Calibri"/>
+              </a:defRPr>
+            </a:pPr>
+            <a:r>
+              <a:t>• ACK/NACK (concept): receiver pulls SDA low for ACK</a:t>
+            </a:r>
+          </a:p>
+          <a:p>
+            <a:pPr>
+              <a:lnSpc>
+                <a:spcPts val="2200"/>
+              </a:lnSpc>
+              <a:spcAft>
+                <a:spcPts val="1000"/>
+              </a:spcAft>
+              <a:defRPr sz="2000" b="0">
+                <a:solidFill>
+                  <a:srgbClr val="333333"/>
+                </a:solidFill>
+                <a:latin typeface="Calibri"/>
+              </a:defRPr>
+            </a:pPr>
+            <a:r>
+              <a:t>      on the 9th clock; high means NACK.</a:t>
             </a:r>
           </a:p>
         </p:txBody>
@@ -7809,7 +9797,7 @@
               </a:defRPr>
             </a:pPr>
             <a:r>
-              <a:t>Summary &amp; next steps</a:t>
+              <a:t>2. Hands-on testbench (i2c_baseline)</a:t>
             </a:r>
           </a:p>
         </p:txBody>
@@ -7851,7 +9839,7 @@
               </a:defRPr>
             </a:pPr>
             <a:r>
-              <a:t>• Understand the I²C protocol (start/stop, addressing,</a:t>
+              <a:t>• Stimulus: `start`, `addr`, `data_in`, `wait(done)`.</a:t>
             </a:r>
           </a:p>
           <a:p>
@@ -7870,7 +9858,7 @@
               </a:defRPr>
             </a:pPr>
             <a:r>
-              <a:t>      ACK/NACK), translate it to RTL (simple master…</a:t>
+              <a:t>• Monitor/self-check: reconstruct address+W and data</a:t>
             </a:r>
           </a:p>
           <a:p>
@@ -7889,45 +9877,7 @@
               </a:defRPr>
             </a:pPr>
             <a:r>
-              <a:t>• Complete module7/CHECKLIST.md</a:t>
-            </a:r>
-          </a:p>
-          <a:p>
-            <a:pPr>
-              <a:lnSpc>
-                <a:spcPts val="2200"/>
-              </a:lnSpc>
-              <a:spcAft>
-                <a:spcPts val="1000"/>
-              </a:spcAft>
-              <a:defRPr sz="2000" b="0">
-                <a:solidFill>
-                  <a:srgbClr val="333333"/>
-                </a:solidFill>
-                <a:latin typeface="Calibri"/>
-              </a:defRPr>
-            </a:pPr>
-            <a:r>
-              <a:t>• Review module7/EXAMPLES.md and run each lab</a:t>
-            </a:r>
-          </a:p>
-          <a:p>
-            <a:pPr>
-              <a:lnSpc>
-                <a:spcPts val="2200"/>
-              </a:lnSpc>
-              <a:spcAft>
-                <a:spcPts val="1000"/>
-              </a:spcAft>
-              <a:defRPr sz="2000" b="0">
-                <a:solidFill>
-                  <a:srgbClr val="333333"/>
-                </a:solidFill>
-                <a:latin typeface="Calibri"/>
-              </a:defRPr>
-            </a:pPr>
-            <a:r>
-              <a:t>• Next: I²C UVM+SV</a:t>
+              <a:t>      from SCL/SDA; compare to expected.</a:t>
             </a:r>
           </a:p>
         </p:txBody>
@@ -8155,6 +10105,1578 @@
 </p:sld>
 </file>
 
+<file path=ppt/slides/slide30.xml><?xml version="1.0" encoding="utf-8"?>
+<p:sld xmlns:a="http://schemas.openxmlformats.org/drawingml/2006/main" xmlns:p="http://schemas.openxmlformats.org/presentationml/2006/main" xmlns:r="http://schemas.openxmlformats.org/officeDocument/2006/relationships">
+  <p:cSld>
+    <p:spTree>
+      <p:nvGrpSpPr>
+        <p:cNvPr id="1" name=""/>
+        <p:cNvGrpSpPr/>
+        <p:nvPr/>
+      </p:nvGrpSpPr>
+      <p:grpSpPr/>
+      <p:sp>
+        <p:nvSpPr>
+          <p:cNvPr id="2" name="TextBox 1"/>
+          <p:cNvSpPr txBox="1"/>
+          <p:nvPr/>
+        </p:nvSpPr>
+        <p:spPr>
+          <a:xfrm>
+            <a:off x="548640" y="2743200"/>
+            <a:ext cx="11064240" cy="1371600"/>
+          </a:xfrm>
+          <a:prstGeom prst="rect">
+            <a:avLst/>
+          </a:prstGeom>
+          <a:noFill/>
+        </p:spPr>
+        <p:txBody>
+          <a:bodyPr wrap="square">
+            <a:noAutofit/>
+          </a:bodyPr>
+          <a:lstStyle/>
+          <a:p>
+            <a:pPr algn="ctr">
+              <a:lnSpc>
+                <a:spcPts val="2200"/>
+              </a:lnSpc>
+              <a:defRPr sz="3600" b="1">
+                <a:solidFill>
+                  <a:srgbClr val="1A1A2E"/>
+                </a:solidFill>
+                <a:latin typeface="Calibri"/>
+              </a:defRPr>
+            </a:pPr>
+            <a:r>
+              <a:t>Hands-on examples</a:t>
+            </a:r>
+          </a:p>
+        </p:txBody>
+      </p:sp>
+      <p:sp>
+        <p:nvSpPr>
+          <p:cNvPr id="3" name="TextBox 2"/>
+          <p:cNvSpPr txBox="1"/>
+          <p:nvPr/>
+        </p:nvSpPr>
+        <p:spPr>
+          <a:xfrm>
+            <a:off x="548640" y="6355080"/>
+            <a:ext cx="11064240" cy="320040"/>
+          </a:xfrm>
+          <a:prstGeom prst="rect">
+            <a:avLst/>
+          </a:prstGeom>
+          <a:noFill/>
+        </p:spPr>
+        <p:txBody>
+          <a:bodyPr wrap="square">
+            <a:noAutofit/>
+          </a:bodyPr>
+          <a:lstStyle/>
+          <a:p>
+            <a:pPr algn="r">
+              <a:lnSpc>
+                <a:spcPts val="2200"/>
+              </a:lnSpc>
+              <a:defRPr sz="1000" b="0">
+                <a:solidFill>
+                  <a:srgbClr val="666666"/>
+                </a:solidFill>
+                <a:latin typeface="Calibri"/>
+              </a:defRPr>
+            </a:pPr>
+            <a:r>
+              <a:t>learn_uart_spi_i2c / Module 7</a:t>
+            </a:r>
+          </a:p>
+        </p:txBody>
+      </p:sp>
+    </p:spTree>
+  </p:cSld>
+  <p:clrMapOvr>
+    <a:masterClrMapping/>
+  </p:clrMapOvr>
+</p:sld>
+</file>
+
+<file path=ppt/slides/slide31.xml><?xml version="1.0" encoding="utf-8"?>
+<p:sld xmlns:a="http://schemas.openxmlformats.org/drawingml/2006/main" xmlns:p="http://schemas.openxmlformats.org/presentationml/2006/main" xmlns:r="http://schemas.openxmlformats.org/officeDocument/2006/relationships">
+  <p:cSld>
+    <p:spTree>
+      <p:nvGrpSpPr>
+        <p:cNvPr id="1" name=""/>
+        <p:cNvGrpSpPr/>
+        <p:nvPr/>
+      </p:nvGrpSpPr>
+      <p:grpSpPr/>
+      <p:sp>
+        <p:nvSpPr>
+          <p:cNvPr id="2" name="TextBox 1"/>
+          <p:cNvSpPr txBox="1"/>
+          <p:nvPr/>
+        </p:nvSpPr>
+        <p:spPr>
+          <a:xfrm>
+            <a:off x="548640" y="411480"/>
+            <a:ext cx="11064240" cy="777240"/>
+          </a:xfrm>
+          <a:prstGeom prst="rect">
+            <a:avLst/>
+          </a:prstGeom>
+          <a:noFill/>
+        </p:spPr>
+        <p:txBody>
+          <a:bodyPr wrap="square">
+            <a:noAutofit/>
+          </a:bodyPr>
+          <a:lstStyle/>
+          <a:p>
+            <a:pPr>
+              <a:lnSpc>
+                <a:spcPts val="2200"/>
+              </a:lnSpc>
+              <a:defRPr sz="2800" b="1">
+                <a:solidFill>
+                  <a:srgbClr val="1A1A2E"/>
+                </a:solidFill>
+                <a:latin typeface="Calibri"/>
+              </a:defRPr>
+            </a:pPr>
+            <a:r>
+              <a:t>Module 7 self-check</a:t>
+            </a:r>
+          </a:p>
+        </p:txBody>
+      </p:sp>
+      <p:sp>
+        <p:nvSpPr>
+          <p:cNvPr id="3" name="TextBox 2"/>
+          <p:cNvSpPr txBox="1"/>
+          <p:nvPr/>
+        </p:nvSpPr>
+        <p:spPr>
+          <a:xfrm>
+            <a:off x="548640" y="1051560"/>
+            <a:ext cx="11064240" cy="914400"/>
+          </a:xfrm>
+          <a:prstGeom prst="rect">
+            <a:avLst/>
+          </a:prstGeom>
+          <a:solidFill>
+            <a:srgbClr val="F4F4F4"/>
+          </a:solidFill>
+        </p:spPr>
+        <p:txBody>
+          <a:bodyPr wrap="square">
+            <a:noAutofit/>
+          </a:bodyPr>
+          <a:lstStyle/>
+          <a:p>
+            <a:pPr>
+              <a:lnSpc>
+                <a:spcPts val="2200"/>
+              </a:lnSpc>
+              <a:spcAft>
+                <a:spcPts val="200"/>
+              </a:spcAft>
+              <a:defRPr sz="2000" b="0">
+                <a:solidFill>
+                  <a:srgbClr val="333333"/>
+                </a:solidFill>
+                <a:latin typeface="Consolas"/>
+              </a:defRPr>
+            </a:pPr>
+            <a:r>
+              <a:t>$ ./scripts/module7.sh --help</a:t>
+            </a:r>
+          </a:p>
+        </p:txBody>
+      </p:sp>
+      <p:pic>
+        <p:nvPicPr>
+          <p:cNvPr id="4" name="Picture 3" descr="module7_check.png"/>
+          <p:cNvPicPr>
+            <a:picLocks noChangeAspect="1"/>
+          </p:cNvPicPr>
+          <p:nvPr/>
+        </p:nvPicPr>
+        <p:blipFill>
+          <a:blip r:embed="rId2"/>
+          <a:stretch>
+            <a:fillRect/>
+          </a:stretch>
+        </p:blipFill>
+        <p:spPr>
+          <a:xfrm>
+            <a:off x="548640" y="1965960"/>
+            <a:ext cx="7071358" cy="3977639"/>
+          </a:xfrm>
+          <a:prstGeom prst="rect">
+            <a:avLst/>
+          </a:prstGeom>
+        </p:spPr>
+      </p:pic>
+      <p:sp>
+        <p:nvSpPr>
+          <p:cNvPr id="5" name="TextBox 4"/>
+          <p:cNvSpPr txBox="1"/>
+          <p:nvPr/>
+        </p:nvSpPr>
+        <p:spPr>
+          <a:xfrm>
+            <a:off x="548640" y="6355080"/>
+            <a:ext cx="11064240" cy="320040"/>
+          </a:xfrm>
+          <a:prstGeom prst="rect">
+            <a:avLst/>
+          </a:prstGeom>
+          <a:noFill/>
+        </p:spPr>
+        <p:txBody>
+          <a:bodyPr wrap="square">
+            <a:noAutofit/>
+          </a:bodyPr>
+          <a:lstStyle/>
+          <a:p>
+            <a:pPr algn="r">
+              <a:lnSpc>
+                <a:spcPts val="2200"/>
+              </a:lnSpc>
+              <a:defRPr sz="1000" b="0">
+                <a:solidFill>
+                  <a:srgbClr val="666666"/>
+                </a:solidFill>
+                <a:latin typeface="Calibri"/>
+              </a:defRPr>
+            </a:pPr>
+            <a:r>
+              <a:t>learn_uart_spi_i2c / Module 7</a:t>
+            </a:r>
+          </a:p>
+        </p:txBody>
+      </p:sp>
+    </p:spTree>
+  </p:cSld>
+  <p:clrMapOvr>
+    <a:masterClrMapping/>
+  </p:clrMapOvr>
+</p:sld>
+</file>
+
+<file path=ppt/slides/slide32.xml><?xml version="1.0" encoding="utf-8"?>
+<p:sld xmlns:a="http://schemas.openxmlformats.org/drawingml/2006/main" xmlns:p="http://schemas.openxmlformats.org/presentationml/2006/main" xmlns:r="http://schemas.openxmlformats.org/officeDocument/2006/relationships">
+  <p:cSld>
+    <p:spTree>
+      <p:nvGrpSpPr>
+        <p:cNvPr id="1" name=""/>
+        <p:cNvGrpSpPr/>
+        <p:nvPr/>
+      </p:nvGrpSpPr>
+      <p:grpSpPr/>
+      <p:sp>
+        <p:nvSpPr>
+          <p:cNvPr id="2" name="TextBox 1"/>
+          <p:cNvSpPr txBox="1"/>
+          <p:nvPr/>
+        </p:nvSpPr>
+        <p:spPr>
+          <a:xfrm>
+            <a:off x="548640" y="411480"/>
+            <a:ext cx="11064240" cy="777240"/>
+          </a:xfrm>
+          <a:prstGeom prst="rect">
+            <a:avLst/>
+          </a:prstGeom>
+          <a:noFill/>
+        </p:spPr>
+        <p:txBody>
+          <a:bodyPr wrap="square">
+            <a:noAutofit/>
+          </a:bodyPr>
+          <a:lstStyle/>
+          <a:p>
+            <a:pPr>
+              <a:lnSpc>
+                <a:spcPts val="2200"/>
+              </a:lnSpc>
+              <a:defRPr sz="2800" b="1">
+                <a:solidFill>
+                  <a:srgbClr val="1A1A2E"/>
+                </a:solidFill>
+                <a:latin typeface="Calibri"/>
+              </a:defRPr>
+            </a:pPr>
+            <a:r>
+              <a:t>Example 1: I²C baseline master</a:t>
+            </a:r>
+          </a:p>
+        </p:txBody>
+      </p:sp>
+      <p:sp>
+        <p:nvSpPr>
+          <p:cNvPr id="3" name="TextBox 2"/>
+          <p:cNvSpPr txBox="1"/>
+          <p:nvPr/>
+        </p:nvSpPr>
+        <p:spPr>
+          <a:xfrm>
+            <a:off x="548640" y="1234440"/>
+            <a:ext cx="11064240" cy="4937760"/>
+          </a:xfrm>
+          <a:prstGeom prst="rect">
+            <a:avLst/>
+          </a:prstGeom>
+          <a:noFill/>
+        </p:spPr>
+        <p:txBody>
+          <a:bodyPr wrap="square">
+            <a:noAutofit/>
+          </a:bodyPr>
+          <a:lstStyle/>
+          <a:p>
+            <a:pPr>
+              <a:lnSpc>
+                <a:spcPts val="2200"/>
+              </a:lnSpc>
+              <a:spcAft>
+                <a:spcPts val="1000"/>
+              </a:spcAft>
+              <a:defRPr sz="2000" b="0">
+                <a:solidFill>
+                  <a:srgbClr val="333333"/>
+                </a:solidFill>
+                <a:latin typeface="Calibri"/>
+              </a:defRPr>
+            </a:pPr>
+            <a:r>
+              <a:t>• I²C master FSM: START → address+W → data → STOP</a:t>
+            </a:r>
+          </a:p>
+          <a:p>
+            <a:pPr>
+              <a:lnSpc>
+                <a:spcPts val="2200"/>
+              </a:lnSpc>
+              <a:spcAft>
+                <a:spcPts val="1000"/>
+              </a:spcAft>
+              <a:defRPr sz="2000" b="0">
+                <a:solidFill>
+                  <a:srgbClr val="333333"/>
+                </a:solidFill>
+                <a:latin typeface="Calibri"/>
+              </a:defRPr>
+            </a:pPr>
+            <a:r>
+              <a:t>• Inline bus monitor sampling SDA on rising SCL</a:t>
+            </a:r>
+          </a:p>
+          <a:p>
+            <a:pPr>
+              <a:lnSpc>
+                <a:spcPts val="2200"/>
+              </a:lnSpc>
+              <a:spcAft>
+                <a:spcPts val="1000"/>
+              </a:spcAft>
+              <a:defRPr sz="2000" b="0">
+                <a:solidFill>
+                  <a:srgbClr val="333333"/>
+                </a:solidFill>
+                <a:latin typeface="Calibri"/>
+              </a:defRPr>
+            </a:pPr>
+            <a:r>
+              <a:t>• Comparing reconstructed address and data bytes to</a:t>
+            </a:r>
+          </a:p>
+          <a:p>
+            <a:pPr>
+              <a:lnSpc>
+                <a:spcPts val="2200"/>
+              </a:lnSpc>
+              <a:spcAft>
+                <a:spcPts val="1000"/>
+              </a:spcAft>
+              <a:defRPr sz="2000" b="0">
+                <a:solidFill>
+                  <a:srgbClr val="333333"/>
+                </a:solidFill>
+                <a:latin typeface="Calibri"/>
+              </a:defRPr>
+            </a:pPr>
+            <a:r>
+              <a:t>      stimulus</a:t>
+            </a:r>
+          </a:p>
+        </p:txBody>
+      </p:sp>
+      <p:sp>
+        <p:nvSpPr>
+          <p:cNvPr id="4" name="TextBox 3"/>
+          <p:cNvSpPr txBox="1"/>
+          <p:nvPr/>
+        </p:nvSpPr>
+        <p:spPr>
+          <a:xfrm>
+            <a:off x="548640" y="6355080"/>
+            <a:ext cx="11064240" cy="320040"/>
+          </a:xfrm>
+          <a:prstGeom prst="rect">
+            <a:avLst/>
+          </a:prstGeom>
+          <a:noFill/>
+        </p:spPr>
+        <p:txBody>
+          <a:bodyPr wrap="square">
+            <a:noAutofit/>
+          </a:bodyPr>
+          <a:lstStyle/>
+          <a:p>
+            <a:pPr algn="r">
+              <a:lnSpc>
+                <a:spcPts val="2200"/>
+              </a:lnSpc>
+              <a:defRPr sz="1000" b="0">
+                <a:solidFill>
+                  <a:srgbClr val="666666"/>
+                </a:solidFill>
+                <a:latin typeface="Calibri"/>
+              </a:defRPr>
+            </a:pPr>
+            <a:r>
+              <a:t>learn_uart_spi_i2c / Module 7</a:t>
+            </a:r>
+          </a:p>
+        </p:txBody>
+      </p:sp>
+    </p:spTree>
+  </p:cSld>
+  <p:clrMapOvr>
+    <a:masterClrMapping/>
+  </p:clrMapOvr>
+</p:sld>
+</file>
+
+<file path=ppt/slides/slide33.xml><?xml version="1.0" encoding="utf-8"?>
+<p:sld xmlns:a="http://schemas.openxmlformats.org/drawingml/2006/main" xmlns:p="http://schemas.openxmlformats.org/presentationml/2006/main" xmlns:r="http://schemas.openxmlformats.org/officeDocument/2006/relationships">
+  <p:cSld>
+    <p:spTree>
+      <p:nvGrpSpPr>
+        <p:cNvPr id="1" name=""/>
+        <p:cNvGrpSpPr/>
+        <p:nvPr/>
+      </p:nvGrpSpPr>
+      <p:grpSpPr/>
+      <p:sp>
+        <p:nvSpPr>
+          <p:cNvPr id="2" name="TextBox 1"/>
+          <p:cNvSpPr txBox="1"/>
+          <p:nvPr/>
+        </p:nvSpPr>
+        <p:spPr>
+          <a:xfrm>
+            <a:off x="548640" y="411480"/>
+            <a:ext cx="11064240" cy="777240"/>
+          </a:xfrm>
+          <a:prstGeom prst="rect">
+            <a:avLst/>
+          </a:prstGeom>
+          <a:noFill/>
+        </p:spPr>
+        <p:txBody>
+          <a:bodyPr wrap="square">
+            <a:noAutofit/>
+          </a:bodyPr>
+          <a:lstStyle/>
+          <a:p>
+            <a:pPr>
+              <a:lnSpc>
+                <a:spcPts val="2200"/>
+              </a:lnSpc>
+              <a:defRPr sz="2800" b="1">
+                <a:solidFill>
+                  <a:srgbClr val="1A1A2E"/>
+                </a:solidFill>
+                <a:latin typeface="Calibri"/>
+              </a:defRPr>
+            </a:pPr>
+            <a:r>
+              <a:t>Demo: I²C baseline master</a:t>
+            </a:r>
+          </a:p>
+        </p:txBody>
+      </p:sp>
+      <p:sp>
+        <p:nvSpPr>
+          <p:cNvPr id="3" name="TextBox 2"/>
+          <p:cNvSpPr txBox="1"/>
+          <p:nvPr/>
+        </p:nvSpPr>
+        <p:spPr>
+          <a:xfrm>
+            <a:off x="548640" y="1051560"/>
+            <a:ext cx="11064240" cy="914400"/>
+          </a:xfrm>
+          <a:prstGeom prst="rect">
+            <a:avLst/>
+          </a:prstGeom>
+          <a:solidFill>
+            <a:srgbClr val="F4F4F4"/>
+          </a:solidFill>
+        </p:spPr>
+        <p:txBody>
+          <a:bodyPr wrap="square">
+            <a:noAutofit/>
+          </a:bodyPr>
+          <a:lstStyle/>
+          <a:p>
+            <a:pPr>
+              <a:lnSpc>
+                <a:spcPts val="2200"/>
+              </a:lnSpc>
+              <a:spcAft>
+                <a:spcPts val="200"/>
+              </a:spcAft>
+              <a:defRPr sz="2000" b="0">
+                <a:solidFill>
+                  <a:srgbClr val="333333"/>
+                </a:solidFill>
+                <a:latin typeface="Consolas"/>
+              </a:defRPr>
+            </a:pPr>
+            <a:r>
+              <a:t>$ cd module7/examples/i2c_baseline &amp;&amp; make run</a:t>
+            </a:r>
+          </a:p>
+        </p:txBody>
+      </p:sp>
+      <p:pic>
+        <p:nvPicPr>
+          <p:cNvPr id="4" name="Picture 3" descr="ex01_i2c_baseline.png"/>
+          <p:cNvPicPr>
+            <a:picLocks noChangeAspect="1"/>
+          </p:cNvPicPr>
+          <p:nvPr/>
+        </p:nvPicPr>
+        <p:blipFill>
+          <a:blip r:embed="rId2"/>
+          <a:stretch>
+            <a:fillRect/>
+          </a:stretch>
+        </p:blipFill>
+        <p:spPr>
+          <a:xfrm>
+            <a:off x="548640" y="1965960"/>
+            <a:ext cx="7071358" cy="3977639"/>
+          </a:xfrm>
+          <a:prstGeom prst="rect">
+            <a:avLst/>
+          </a:prstGeom>
+        </p:spPr>
+      </p:pic>
+      <p:sp>
+        <p:nvSpPr>
+          <p:cNvPr id="5" name="TextBox 4"/>
+          <p:cNvSpPr txBox="1"/>
+          <p:nvPr/>
+        </p:nvSpPr>
+        <p:spPr>
+          <a:xfrm>
+            <a:off x="548640" y="6355080"/>
+            <a:ext cx="11064240" cy="320040"/>
+          </a:xfrm>
+          <a:prstGeom prst="rect">
+            <a:avLst/>
+          </a:prstGeom>
+          <a:noFill/>
+        </p:spPr>
+        <p:txBody>
+          <a:bodyPr wrap="square">
+            <a:noAutofit/>
+          </a:bodyPr>
+          <a:lstStyle/>
+          <a:p>
+            <a:pPr algn="r">
+              <a:lnSpc>
+                <a:spcPts val="2200"/>
+              </a:lnSpc>
+              <a:defRPr sz="1000" b="0">
+                <a:solidFill>
+                  <a:srgbClr val="666666"/>
+                </a:solidFill>
+                <a:latin typeface="Calibri"/>
+              </a:defRPr>
+            </a:pPr>
+            <a:r>
+              <a:t>learn_uart_spi_i2c / Module 7</a:t>
+            </a:r>
+          </a:p>
+        </p:txBody>
+      </p:sp>
+    </p:spTree>
+  </p:cSld>
+  <p:clrMapOvr>
+    <a:masterClrMapping/>
+  </p:clrMapOvr>
+</p:sld>
+</file>
+
+<file path=ppt/slides/slide34.xml><?xml version="1.0" encoding="utf-8"?>
+<p:sld xmlns:a="http://schemas.openxmlformats.org/drawingml/2006/main" xmlns:p="http://schemas.openxmlformats.org/presentationml/2006/main" xmlns:r="http://schemas.openxmlformats.org/officeDocument/2006/relationships">
+  <p:cSld>
+    <p:spTree>
+      <p:nvGrpSpPr>
+        <p:cNvPr id="1" name=""/>
+        <p:cNvGrpSpPr/>
+        <p:nvPr/>
+      </p:nvGrpSpPr>
+      <p:grpSpPr/>
+      <p:sp>
+        <p:nvSpPr>
+          <p:cNvPr id="2" name="TextBox 1"/>
+          <p:cNvSpPr txBox="1"/>
+          <p:nvPr/>
+        </p:nvSpPr>
+        <p:spPr>
+          <a:xfrm>
+            <a:off x="548640" y="2743200"/>
+            <a:ext cx="11064240" cy="1371600"/>
+          </a:xfrm>
+          <a:prstGeom prst="rect">
+            <a:avLst/>
+          </a:prstGeom>
+          <a:noFill/>
+        </p:spPr>
+        <p:txBody>
+          <a:bodyPr wrap="square">
+            <a:noAutofit/>
+          </a:bodyPr>
+          <a:lstStyle/>
+          <a:p>
+            <a:pPr algn="ctr">
+              <a:lnSpc>
+                <a:spcPts val="2200"/>
+              </a:lnSpc>
+              <a:defRPr sz="3600" b="1">
+                <a:solidFill>
+                  <a:srgbClr val="1A1A2E"/>
+                </a:solidFill>
+                <a:latin typeface="Calibri"/>
+              </a:defRPr>
+            </a:pPr>
+            <a:r>
+              <a:t>Key concepts</a:t>
+            </a:r>
+          </a:p>
+        </p:txBody>
+      </p:sp>
+      <p:sp>
+        <p:nvSpPr>
+          <p:cNvPr id="3" name="TextBox 2"/>
+          <p:cNvSpPr txBox="1"/>
+          <p:nvPr/>
+        </p:nvSpPr>
+        <p:spPr>
+          <a:xfrm>
+            <a:off x="548640" y="6355080"/>
+            <a:ext cx="11064240" cy="320040"/>
+          </a:xfrm>
+          <a:prstGeom prst="rect">
+            <a:avLst/>
+          </a:prstGeom>
+          <a:noFill/>
+        </p:spPr>
+        <p:txBody>
+          <a:bodyPr wrap="square">
+            <a:noAutofit/>
+          </a:bodyPr>
+          <a:lstStyle/>
+          <a:p>
+            <a:pPr algn="r">
+              <a:lnSpc>
+                <a:spcPts val="2200"/>
+              </a:lnSpc>
+              <a:defRPr sz="1000" b="0">
+                <a:solidFill>
+                  <a:srgbClr val="666666"/>
+                </a:solidFill>
+                <a:latin typeface="Calibri"/>
+              </a:defRPr>
+            </a:pPr>
+            <a:r>
+              <a:t>learn_uart_spi_i2c / Module 7</a:t>
+            </a:r>
+          </a:p>
+        </p:txBody>
+      </p:sp>
+    </p:spTree>
+  </p:cSld>
+  <p:clrMapOvr>
+    <a:masterClrMapping/>
+  </p:clrMapOvr>
+</p:sld>
+</file>
+
+<file path=ppt/slides/slide35.xml><?xml version="1.0" encoding="utf-8"?>
+<p:sld xmlns:a="http://schemas.openxmlformats.org/drawingml/2006/main" xmlns:p="http://schemas.openxmlformats.org/presentationml/2006/main" xmlns:r="http://schemas.openxmlformats.org/officeDocument/2006/relationships">
+  <p:cSld>
+    <p:spTree>
+      <p:nvGrpSpPr>
+        <p:cNvPr id="1" name=""/>
+        <p:cNvGrpSpPr/>
+        <p:nvPr/>
+      </p:nvGrpSpPr>
+      <p:grpSpPr/>
+      <p:sp>
+        <p:nvSpPr>
+          <p:cNvPr id="2" name="TextBox 1"/>
+          <p:cNvSpPr txBox="1"/>
+          <p:nvPr/>
+        </p:nvSpPr>
+        <p:spPr>
+          <a:xfrm>
+            <a:off x="548640" y="411480"/>
+            <a:ext cx="11064240" cy="777240"/>
+          </a:xfrm>
+          <a:prstGeom prst="rect">
+            <a:avLst/>
+          </a:prstGeom>
+          <a:noFill/>
+        </p:spPr>
+        <p:txBody>
+          <a:bodyPr wrap="square">
+            <a:noAutofit/>
+          </a:bodyPr>
+          <a:lstStyle/>
+          <a:p>
+            <a:pPr>
+              <a:lnSpc>
+                <a:spcPts val="2200"/>
+              </a:lnSpc>
+              <a:defRPr sz="2800" b="1">
+                <a:solidFill>
+                  <a:srgbClr val="1A1A2E"/>
+                </a:solidFill>
+                <a:latin typeface="Calibri"/>
+              </a:defRPr>
+            </a:pPr>
+            <a:r>
+              <a:t>1. Two-wire bus</a:t>
+            </a:r>
+          </a:p>
+        </p:txBody>
+      </p:sp>
+      <p:sp>
+        <p:nvSpPr>
+          <p:cNvPr id="3" name="TextBox 2"/>
+          <p:cNvSpPr txBox="1"/>
+          <p:nvPr/>
+        </p:nvSpPr>
+        <p:spPr>
+          <a:xfrm>
+            <a:off x="548640" y="1234440"/>
+            <a:ext cx="11064240" cy="4937760"/>
+          </a:xfrm>
+          <a:prstGeom prst="rect">
+            <a:avLst/>
+          </a:prstGeom>
+          <a:noFill/>
+        </p:spPr>
+        <p:txBody>
+          <a:bodyPr wrap="square">
+            <a:noAutofit/>
+          </a:bodyPr>
+          <a:lstStyle/>
+          <a:p>
+            <a:pPr>
+              <a:lnSpc>
+                <a:spcPts val="2200"/>
+              </a:lnSpc>
+              <a:spcAft>
+                <a:spcPts val="1000"/>
+              </a:spcAft>
+              <a:defRPr sz="2000" b="0">
+                <a:solidFill>
+                  <a:srgbClr val="333333"/>
+                </a:solidFill>
+                <a:latin typeface="Calibri"/>
+              </a:defRPr>
+            </a:pPr>
+            <a:r>
+              <a:t>• SCL + SDA; START/STOP when SCL is high; data changed</a:t>
+            </a:r>
+          </a:p>
+          <a:p>
+            <a:pPr>
+              <a:lnSpc>
+                <a:spcPts val="2200"/>
+              </a:lnSpc>
+              <a:spcAft>
+                <a:spcPts val="1000"/>
+              </a:spcAft>
+              <a:defRPr sz="2000" b="0">
+                <a:solidFill>
+                  <a:srgbClr val="333333"/>
+                </a:solidFill>
+                <a:latin typeface="Calibri"/>
+              </a:defRPr>
+            </a:pPr>
+            <a:r>
+              <a:t>      when SCL is low (simplified model).</a:t>
+            </a:r>
+          </a:p>
+        </p:txBody>
+      </p:sp>
+      <p:sp>
+        <p:nvSpPr>
+          <p:cNvPr id="4" name="TextBox 3"/>
+          <p:cNvSpPr txBox="1"/>
+          <p:nvPr/>
+        </p:nvSpPr>
+        <p:spPr>
+          <a:xfrm>
+            <a:off x="548640" y="6355080"/>
+            <a:ext cx="11064240" cy="320040"/>
+          </a:xfrm>
+          <a:prstGeom prst="rect">
+            <a:avLst/>
+          </a:prstGeom>
+          <a:noFill/>
+        </p:spPr>
+        <p:txBody>
+          <a:bodyPr wrap="square">
+            <a:noAutofit/>
+          </a:bodyPr>
+          <a:lstStyle/>
+          <a:p>
+            <a:pPr algn="r">
+              <a:lnSpc>
+                <a:spcPts val="2200"/>
+              </a:lnSpc>
+              <a:defRPr sz="1000" b="0">
+                <a:solidFill>
+                  <a:srgbClr val="666666"/>
+                </a:solidFill>
+                <a:latin typeface="Calibri"/>
+              </a:defRPr>
+            </a:pPr>
+            <a:r>
+              <a:t>learn_uart_spi_i2c / Module 7</a:t>
+            </a:r>
+          </a:p>
+        </p:txBody>
+      </p:sp>
+    </p:spTree>
+  </p:cSld>
+  <p:clrMapOvr>
+    <a:masterClrMapping/>
+  </p:clrMapOvr>
+</p:sld>
+</file>
+
+<file path=ppt/slides/slide36.xml><?xml version="1.0" encoding="utf-8"?>
+<p:sld xmlns:a="http://schemas.openxmlformats.org/drawingml/2006/main" xmlns:p="http://schemas.openxmlformats.org/presentationml/2006/main" xmlns:r="http://schemas.openxmlformats.org/officeDocument/2006/relationships">
+  <p:cSld>
+    <p:spTree>
+      <p:nvGrpSpPr>
+        <p:cNvPr id="1" name=""/>
+        <p:cNvGrpSpPr/>
+        <p:nvPr/>
+      </p:nvGrpSpPr>
+      <p:grpSpPr/>
+      <p:sp>
+        <p:nvSpPr>
+          <p:cNvPr id="2" name="TextBox 1"/>
+          <p:cNvSpPr txBox="1"/>
+          <p:nvPr/>
+        </p:nvSpPr>
+        <p:spPr>
+          <a:xfrm>
+            <a:off x="548640" y="411480"/>
+            <a:ext cx="11064240" cy="777240"/>
+          </a:xfrm>
+          <a:prstGeom prst="rect">
+            <a:avLst/>
+          </a:prstGeom>
+          <a:noFill/>
+        </p:spPr>
+        <p:txBody>
+          <a:bodyPr wrap="square">
+            <a:noAutofit/>
+          </a:bodyPr>
+          <a:lstStyle/>
+          <a:p>
+            <a:pPr>
+              <a:lnSpc>
+                <a:spcPts val="2200"/>
+              </a:lnSpc>
+              <a:defRPr sz="2800" b="1">
+                <a:solidFill>
+                  <a:srgbClr val="1A1A2E"/>
+                </a:solidFill>
+                <a:latin typeface="Calibri"/>
+              </a:defRPr>
+            </a:pPr>
+            <a:r>
+              <a:t>2. Address + data phases</a:t>
+            </a:r>
+          </a:p>
+        </p:txBody>
+      </p:sp>
+      <p:sp>
+        <p:nvSpPr>
+          <p:cNvPr id="3" name="TextBox 2"/>
+          <p:cNvSpPr txBox="1"/>
+          <p:nvPr/>
+        </p:nvSpPr>
+        <p:spPr>
+          <a:xfrm>
+            <a:off x="548640" y="1234440"/>
+            <a:ext cx="11064240" cy="4937760"/>
+          </a:xfrm>
+          <a:prstGeom prst="rect">
+            <a:avLst/>
+          </a:prstGeom>
+          <a:noFill/>
+        </p:spPr>
+        <p:txBody>
+          <a:bodyPr wrap="square">
+            <a:noAutofit/>
+          </a:bodyPr>
+          <a:lstStyle/>
+          <a:p>
+            <a:pPr>
+              <a:lnSpc>
+                <a:spcPts val="2200"/>
+              </a:lnSpc>
+              <a:spcAft>
+                <a:spcPts val="1000"/>
+              </a:spcAft>
+              <a:defRPr sz="2000" b="0">
+                <a:solidFill>
+                  <a:srgbClr val="333333"/>
+                </a:solidFill>
+                <a:latin typeface="Calibri"/>
+              </a:defRPr>
+            </a:pPr>
+            <a:r>
+              <a:t>• 8 bits address+R/W (MSB first), then 8 bits data —</a:t>
+            </a:r>
+          </a:p>
+          <a:p>
+            <a:pPr>
+              <a:lnSpc>
+                <a:spcPts val="2200"/>
+              </a:lnSpc>
+              <a:spcAft>
+                <a:spcPts val="1000"/>
+              </a:spcAft>
+              <a:defRPr sz="2000" b="0">
+                <a:solidFill>
+                  <a:srgbClr val="333333"/>
+                </a:solidFill>
+                <a:latin typeface="Calibri"/>
+              </a:defRPr>
+            </a:pPr>
+            <a:r>
+              <a:t>      monitor both separately.</a:t>
+            </a:r>
+          </a:p>
+        </p:txBody>
+      </p:sp>
+      <p:sp>
+        <p:nvSpPr>
+          <p:cNvPr id="4" name="TextBox 3"/>
+          <p:cNvSpPr txBox="1"/>
+          <p:nvPr/>
+        </p:nvSpPr>
+        <p:spPr>
+          <a:xfrm>
+            <a:off x="548640" y="6355080"/>
+            <a:ext cx="11064240" cy="320040"/>
+          </a:xfrm>
+          <a:prstGeom prst="rect">
+            <a:avLst/>
+          </a:prstGeom>
+          <a:noFill/>
+        </p:spPr>
+        <p:txBody>
+          <a:bodyPr wrap="square">
+            <a:noAutofit/>
+          </a:bodyPr>
+          <a:lstStyle/>
+          <a:p>
+            <a:pPr algn="r">
+              <a:lnSpc>
+                <a:spcPts val="2200"/>
+              </a:lnSpc>
+              <a:defRPr sz="1000" b="0">
+                <a:solidFill>
+                  <a:srgbClr val="666666"/>
+                </a:solidFill>
+                <a:latin typeface="Calibri"/>
+              </a:defRPr>
+            </a:pPr>
+            <a:r>
+              <a:t>learn_uart_spi_i2c / Module 7</a:t>
+            </a:r>
+          </a:p>
+        </p:txBody>
+      </p:sp>
+    </p:spTree>
+  </p:cSld>
+  <p:clrMapOvr>
+    <a:masterClrMapping/>
+  </p:clrMapOvr>
+</p:sld>
+</file>
+
+<file path=ppt/slides/slide37.xml><?xml version="1.0" encoding="utf-8"?>
+<p:sld xmlns:a="http://schemas.openxmlformats.org/drawingml/2006/main" xmlns:p="http://schemas.openxmlformats.org/presentationml/2006/main" xmlns:r="http://schemas.openxmlformats.org/officeDocument/2006/relationships">
+  <p:cSld>
+    <p:spTree>
+      <p:nvGrpSpPr>
+        <p:cNvPr id="1" name=""/>
+        <p:cNvGrpSpPr/>
+        <p:nvPr/>
+      </p:nvGrpSpPr>
+      <p:grpSpPr/>
+      <p:sp>
+        <p:nvSpPr>
+          <p:cNvPr id="2" name="TextBox 1"/>
+          <p:cNvSpPr txBox="1"/>
+          <p:nvPr/>
+        </p:nvSpPr>
+        <p:spPr>
+          <a:xfrm>
+            <a:off x="548640" y="2743200"/>
+            <a:ext cx="11064240" cy="1371600"/>
+          </a:xfrm>
+          <a:prstGeom prst="rect">
+            <a:avLst/>
+          </a:prstGeom>
+          <a:noFill/>
+        </p:spPr>
+        <p:txBody>
+          <a:bodyPr wrap="square">
+            <a:noAutofit/>
+          </a:bodyPr>
+          <a:lstStyle/>
+          <a:p>
+            <a:pPr algn="ctr">
+              <a:lnSpc>
+                <a:spcPts val="2200"/>
+              </a:lnSpc>
+              <a:defRPr sz="3600" b="1">
+                <a:solidFill>
+                  <a:srgbClr val="1A1A2E"/>
+                </a:solidFill>
+                <a:latin typeface="Calibri"/>
+              </a:defRPr>
+            </a:pPr>
+            <a:r>
+              <a:t>Common pitfalls</a:t>
+            </a:r>
+          </a:p>
+        </p:txBody>
+      </p:sp>
+      <p:sp>
+        <p:nvSpPr>
+          <p:cNvPr id="3" name="TextBox 2"/>
+          <p:cNvSpPr txBox="1"/>
+          <p:nvPr/>
+        </p:nvSpPr>
+        <p:spPr>
+          <a:xfrm>
+            <a:off x="548640" y="6355080"/>
+            <a:ext cx="11064240" cy="320040"/>
+          </a:xfrm>
+          <a:prstGeom prst="rect">
+            <a:avLst/>
+          </a:prstGeom>
+          <a:noFill/>
+        </p:spPr>
+        <p:txBody>
+          <a:bodyPr wrap="square">
+            <a:noAutofit/>
+          </a:bodyPr>
+          <a:lstStyle/>
+          <a:p>
+            <a:pPr algn="r">
+              <a:lnSpc>
+                <a:spcPts val="2200"/>
+              </a:lnSpc>
+              <a:defRPr sz="1000" b="0">
+                <a:solidFill>
+                  <a:srgbClr val="666666"/>
+                </a:solidFill>
+                <a:latin typeface="Calibri"/>
+              </a:defRPr>
+            </a:pPr>
+            <a:r>
+              <a:t>learn_uart_spi_i2c / Module 7</a:t>
+            </a:r>
+          </a:p>
+        </p:txBody>
+      </p:sp>
+    </p:spTree>
+  </p:cSld>
+  <p:clrMapOvr>
+    <a:masterClrMapping/>
+  </p:clrMapOvr>
+</p:sld>
+</file>
+
+<file path=ppt/slides/slide38.xml><?xml version="1.0" encoding="utf-8"?>
+<p:sld xmlns:a="http://schemas.openxmlformats.org/drawingml/2006/main" xmlns:p="http://schemas.openxmlformats.org/presentationml/2006/main" xmlns:r="http://schemas.openxmlformats.org/officeDocument/2006/relationships">
+  <p:cSld>
+    <p:spTree>
+      <p:nvGrpSpPr>
+        <p:cNvPr id="1" name=""/>
+        <p:cNvGrpSpPr/>
+        <p:nvPr/>
+      </p:nvGrpSpPr>
+      <p:grpSpPr/>
+      <p:sp>
+        <p:nvSpPr>
+          <p:cNvPr id="2" name="TextBox 1"/>
+          <p:cNvSpPr txBox="1"/>
+          <p:nvPr/>
+        </p:nvSpPr>
+        <p:spPr>
+          <a:xfrm>
+            <a:off x="548640" y="411480"/>
+            <a:ext cx="11064240" cy="777240"/>
+          </a:xfrm>
+          <a:prstGeom prst="rect">
+            <a:avLst/>
+          </a:prstGeom>
+          <a:noFill/>
+        </p:spPr>
+        <p:txBody>
+          <a:bodyPr wrap="square">
+            <a:noAutofit/>
+          </a:bodyPr>
+          <a:lstStyle/>
+          <a:p>
+            <a:pPr>
+              <a:lnSpc>
+                <a:spcPts val="2200"/>
+              </a:lnSpc>
+              <a:defRPr sz="2800" b="1">
+                <a:solidFill>
+                  <a:srgbClr val="1A1A2E"/>
+                </a:solidFill>
+                <a:latin typeface="Calibri"/>
+              </a:defRPr>
+            </a:pPr>
+            <a:r>
+              <a:t>Ignoring START detection</a:t>
+            </a:r>
+          </a:p>
+        </p:txBody>
+      </p:sp>
+      <p:sp>
+        <p:nvSpPr>
+          <p:cNvPr id="3" name="TextBox 2"/>
+          <p:cNvSpPr txBox="1"/>
+          <p:nvPr/>
+        </p:nvSpPr>
+        <p:spPr>
+          <a:xfrm>
+            <a:off x="548640" y="1234440"/>
+            <a:ext cx="11064240" cy="4937760"/>
+          </a:xfrm>
+          <a:prstGeom prst="rect">
+            <a:avLst/>
+          </a:prstGeom>
+          <a:noFill/>
+        </p:spPr>
+        <p:txBody>
+          <a:bodyPr wrap="square">
+            <a:noAutofit/>
+          </a:bodyPr>
+          <a:lstStyle/>
+          <a:p>
+            <a:pPr>
+              <a:lnSpc>
+                <a:spcPts val="2200"/>
+              </a:lnSpc>
+              <a:spcAft>
+                <a:spcPts val="1000"/>
+              </a:spcAft>
+              <a:defRPr sz="2000" b="0">
+                <a:solidFill>
+                  <a:srgbClr val="333333"/>
+                </a:solidFill>
+                <a:latin typeface="Calibri"/>
+              </a:defRPr>
+            </a:pPr>
+            <a:r>
+              <a:t>• Mistake: Sampling bits before a valid START</a:t>
+            </a:r>
+          </a:p>
+          <a:p>
+            <a:pPr>
+              <a:lnSpc>
+                <a:spcPts val="2200"/>
+              </a:lnSpc>
+              <a:spcAft>
+                <a:spcPts val="1000"/>
+              </a:spcAft>
+              <a:defRPr sz="2000" b="0">
+                <a:solidFill>
+                  <a:srgbClr val="333333"/>
+                </a:solidFill>
+                <a:latin typeface="Calibri"/>
+              </a:defRPr>
+            </a:pPr>
+            <a:r>
+              <a:t>      condition.</a:t>
+            </a:r>
+          </a:p>
+          <a:p>
+            <a:pPr>
+              <a:lnSpc>
+                <a:spcPts val="2200"/>
+              </a:lnSpc>
+              <a:spcAft>
+                <a:spcPts val="1000"/>
+              </a:spcAft>
+              <a:defRPr sz="2000" b="0">
+                <a:solidFill>
+                  <a:srgbClr val="333333"/>
+                </a:solidFill>
+                <a:latin typeface="Calibri"/>
+              </a:defRPr>
+            </a:pPr>
+            <a:r>
+              <a:t>• Correct: Detect SDA 1→0 while SCL high, then sample</a:t>
+            </a:r>
+          </a:p>
+          <a:p>
+            <a:pPr>
+              <a:lnSpc>
+                <a:spcPts val="2200"/>
+              </a:lnSpc>
+              <a:spcAft>
+                <a:spcPts val="1000"/>
+              </a:spcAft>
+              <a:defRPr sz="2000" b="0">
+                <a:solidFill>
+                  <a:srgbClr val="333333"/>
+                </a:solidFill>
+                <a:latin typeface="Calibri"/>
+              </a:defRPr>
+            </a:pPr>
+            <a:r>
+              <a:t>      on rising SCL.</a:t>
+            </a:r>
+          </a:p>
+          <a:p>
+            <a:pPr>
+              <a:lnSpc>
+                <a:spcPts val="2200"/>
+              </a:lnSpc>
+              <a:spcAft>
+                <a:spcPts val="1000"/>
+              </a:spcAft>
+              <a:defRPr sz="2000" b="0">
+                <a:solidFill>
+                  <a:srgbClr val="333333"/>
+                </a:solidFill>
+                <a:latin typeface="Calibri"/>
+              </a:defRPr>
+            </a:pPr>
+            <a:r>
+              <a:t>• Why: Reconstructed bytes align to wrong frame</a:t>
+            </a:r>
+          </a:p>
+          <a:p>
+            <a:pPr>
+              <a:lnSpc>
+                <a:spcPts val="2200"/>
+              </a:lnSpc>
+              <a:spcAft>
+                <a:spcPts val="1000"/>
+              </a:spcAft>
+              <a:defRPr sz="2000" b="0">
+                <a:solidFill>
+                  <a:srgbClr val="333333"/>
+                </a:solidFill>
+                <a:latin typeface="Calibri"/>
+              </a:defRPr>
+            </a:pPr>
+            <a:r>
+              <a:t>      boundary.</a:t>
+            </a:r>
+          </a:p>
+        </p:txBody>
+      </p:sp>
+      <p:sp>
+        <p:nvSpPr>
+          <p:cNvPr id="4" name="TextBox 3"/>
+          <p:cNvSpPr txBox="1"/>
+          <p:nvPr/>
+        </p:nvSpPr>
+        <p:spPr>
+          <a:xfrm>
+            <a:off x="548640" y="6355080"/>
+            <a:ext cx="11064240" cy="320040"/>
+          </a:xfrm>
+          <a:prstGeom prst="rect">
+            <a:avLst/>
+          </a:prstGeom>
+          <a:noFill/>
+        </p:spPr>
+        <p:txBody>
+          <a:bodyPr wrap="square">
+            <a:noAutofit/>
+          </a:bodyPr>
+          <a:lstStyle/>
+          <a:p>
+            <a:pPr algn="r">
+              <a:lnSpc>
+                <a:spcPts val="2200"/>
+              </a:lnSpc>
+              <a:defRPr sz="1000" b="0">
+                <a:solidFill>
+                  <a:srgbClr val="666666"/>
+                </a:solidFill>
+                <a:latin typeface="Calibri"/>
+              </a:defRPr>
+            </a:pPr>
+            <a:r>
+              <a:t>learn_uart_spi_i2c / Module 7</a:t>
+            </a:r>
+          </a:p>
+        </p:txBody>
+      </p:sp>
+    </p:spTree>
+  </p:cSld>
+  <p:clrMapOvr>
+    <a:masterClrMapping/>
+  </p:clrMapOvr>
+</p:sld>
+</file>
+
+<file path=ppt/slides/slide39.xml><?xml version="1.0" encoding="utf-8"?>
+<p:sld xmlns:a="http://schemas.openxmlformats.org/drawingml/2006/main" xmlns:p="http://schemas.openxmlformats.org/presentationml/2006/main" xmlns:r="http://schemas.openxmlformats.org/officeDocument/2006/relationships">
+  <p:cSld>
+    <p:spTree>
+      <p:nvGrpSpPr>
+        <p:cNvPr id="1" name=""/>
+        <p:cNvGrpSpPr/>
+        <p:nvPr/>
+      </p:nvGrpSpPr>
+      <p:grpSpPr/>
+      <p:sp>
+        <p:nvSpPr>
+          <p:cNvPr id="2" name="TextBox 1"/>
+          <p:cNvSpPr txBox="1"/>
+          <p:nvPr/>
+        </p:nvSpPr>
+        <p:spPr>
+          <a:xfrm>
+            <a:off x="548640" y="411480"/>
+            <a:ext cx="11064240" cy="777240"/>
+          </a:xfrm>
+          <a:prstGeom prst="rect">
+            <a:avLst/>
+          </a:prstGeom>
+          <a:noFill/>
+        </p:spPr>
+        <p:txBody>
+          <a:bodyPr wrap="square">
+            <a:noAutofit/>
+          </a:bodyPr>
+          <a:lstStyle/>
+          <a:p>
+            <a:pPr>
+              <a:lnSpc>
+                <a:spcPts val="2200"/>
+              </a:lnSpc>
+              <a:defRPr sz="2800" b="1">
+                <a:solidFill>
+                  <a:srgbClr val="1A1A2E"/>
+                </a:solidFill>
+                <a:latin typeface="Calibri"/>
+              </a:defRPr>
+            </a:pPr>
+            <a:r>
+              <a:t>Expecting full-spec ACK</a:t>
+            </a:r>
+          </a:p>
+        </p:txBody>
+      </p:sp>
+      <p:sp>
+        <p:nvSpPr>
+          <p:cNvPr id="3" name="TextBox 2"/>
+          <p:cNvSpPr txBox="1"/>
+          <p:nvPr/>
+        </p:nvSpPr>
+        <p:spPr>
+          <a:xfrm>
+            <a:off x="548640" y="1234440"/>
+            <a:ext cx="11064240" cy="4937760"/>
+          </a:xfrm>
+          <a:prstGeom prst="rect">
+            <a:avLst/>
+          </a:prstGeom>
+          <a:noFill/>
+        </p:spPr>
+        <p:txBody>
+          <a:bodyPr wrap="square">
+            <a:noAutofit/>
+          </a:bodyPr>
+          <a:lstStyle/>
+          <a:p>
+            <a:pPr>
+              <a:lnSpc>
+                <a:spcPts val="2200"/>
+              </a:lnSpc>
+              <a:spcAft>
+                <a:spcPts val="1000"/>
+              </a:spcAft>
+              <a:defRPr sz="2000" b="0">
+                <a:solidFill>
+                  <a:srgbClr val="333333"/>
+                </a:solidFill>
+                <a:latin typeface="Calibri"/>
+              </a:defRPr>
+            </a:pPr>
+            <a:r>
+              <a:t>• Mistake: Assuming teaching RTL models open-drain</a:t>
+            </a:r>
+          </a:p>
+          <a:p>
+            <a:pPr>
+              <a:lnSpc>
+                <a:spcPts val="2200"/>
+              </a:lnSpc>
+              <a:spcAft>
+                <a:spcPts val="1000"/>
+              </a:spcAft>
+              <a:defRPr sz="2000" b="0">
+                <a:solidFill>
+                  <a:srgbClr val="333333"/>
+                </a:solidFill>
+                <a:latin typeface="Calibri"/>
+              </a:defRPr>
+            </a:pPr>
+            <a:r>
+              <a:t>      ACK/NACK.</a:t>
+            </a:r>
+          </a:p>
+          <a:p>
+            <a:pPr>
+              <a:lnSpc>
+                <a:spcPts val="2200"/>
+              </a:lnSpc>
+              <a:spcAft>
+                <a:spcPts val="1000"/>
+              </a:spcAft>
+              <a:defRPr sz="2000" b="0">
+                <a:solidFill>
+                  <a:srgbClr val="333333"/>
+                </a:solidFill>
+                <a:latin typeface="Calibri"/>
+              </a:defRPr>
+            </a:pPr>
+            <a:r>
+              <a:t>• Correct: Treat baseline as sequencing practice; ACK</a:t>
+            </a:r>
+          </a:p>
+          <a:p>
+            <a:pPr>
+              <a:lnSpc>
+                <a:spcPts val="2200"/>
+              </a:lnSpc>
+              <a:spcAft>
+                <a:spcPts val="1000"/>
+              </a:spcAft>
+              <a:defRPr sz="2000" b="0">
+                <a:solidFill>
+                  <a:srgbClr val="333333"/>
+                </a:solidFill>
+                <a:latin typeface="Calibri"/>
+              </a:defRPr>
+            </a:pPr>
+            <a:r>
+              <a:t>      comes in extensions.</a:t>
+            </a:r>
+          </a:p>
+          <a:p>
+            <a:pPr>
+              <a:lnSpc>
+                <a:spcPts val="2200"/>
+              </a:lnSpc>
+              <a:spcAft>
+                <a:spcPts val="1000"/>
+              </a:spcAft>
+              <a:defRPr sz="2000" b="0">
+                <a:solidFill>
+                  <a:srgbClr val="333333"/>
+                </a:solidFill>
+                <a:latin typeface="Calibri"/>
+              </a:defRPr>
+            </a:pPr>
+            <a:r>
+              <a:t>• Why: Our push-pull teaching DUT simplifies the bus.</a:t>
+            </a:r>
+          </a:p>
+        </p:txBody>
+      </p:sp>
+      <p:sp>
+        <p:nvSpPr>
+          <p:cNvPr id="4" name="TextBox 3"/>
+          <p:cNvSpPr txBox="1"/>
+          <p:nvPr/>
+        </p:nvSpPr>
+        <p:spPr>
+          <a:xfrm>
+            <a:off x="548640" y="6355080"/>
+            <a:ext cx="11064240" cy="320040"/>
+          </a:xfrm>
+          <a:prstGeom prst="rect">
+            <a:avLst/>
+          </a:prstGeom>
+          <a:noFill/>
+        </p:spPr>
+        <p:txBody>
+          <a:bodyPr wrap="square">
+            <a:noAutofit/>
+          </a:bodyPr>
+          <a:lstStyle/>
+          <a:p>
+            <a:pPr algn="r">
+              <a:lnSpc>
+                <a:spcPts val="2200"/>
+              </a:lnSpc>
+              <a:defRPr sz="1000" b="0">
+                <a:solidFill>
+                  <a:srgbClr val="666666"/>
+                </a:solidFill>
+                <a:latin typeface="Calibri"/>
+              </a:defRPr>
+            </a:pPr>
+            <a:r>
+              <a:t>learn_uart_spi_i2c / Module 7</a:t>
+            </a:r>
+          </a:p>
+        </p:txBody>
+      </p:sp>
+    </p:spTree>
+  </p:cSld>
+  <p:clrMapOvr>
+    <a:masterClrMapping/>
+  </p:clrMapOvr>
+</p:sld>
+</file>
+
 <file path=ppt/slides/slide4.xml><?xml version="1.0" encoding="utf-8"?>
 <p:sld xmlns:a="http://schemas.openxmlformats.org/drawingml/2006/main" xmlns:p="http://schemas.openxmlformats.org/presentationml/2006/main" xmlns:r="http://schemas.openxmlformats.org/officeDocument/2006/relationships">
   <p:cSld>
@@ -8270,6 +11792,744 @@
       <p:sp>
         <p:nvSpPr>
           <p:cNvPr id="5" name="TextBox 4"/>
+          <p:cNvSpPr txBox="1"/>
+          <p:nvPr/>
+        </p:nvSpPr>
+        <p:spPr>
+          <a:xfrm>
+            <a:off x="548640" y="6355080"/>
+            <a:ext cx="11064240" cy="320040"/>
+          </a:xfrm>
+          <a:prstGeom prst="rect">
+            <a:avLst/>
+          </a:prstGeom>
+          <a:noFill/>
+        </p:spPr>
+        <p:txBody>
+          <a:bodyPr wrap="square">
+            <a:noAutofit/>
+          </a:bodyPr>
+          <a:lstStyle/>
+          <a:p>
+            <a:pPr algn="r">
+              <a:lnSpc>
+                <a:spcPts val="2200"/>
+              </a:lnSpc>
+              <a:defRPr sz="1000" b="0">
+                <a:solidFill>
+                  <a:srgbClr val="666666"/>
+                </a:solidFill>
+                <a:latin typeface="Calibri"/>
+              </a:defRPr>
+            </a:pPr>
+            <a:r>
+              <a:t>learn_uart_spi_i2c / Module 7</a:t>
+            </a:r>
+          </a:p>
+        </p:txBody>
+      </p:sp>
+    </p:spTree>
+  </p:cSld>
+  <p:clrMapOvr>
+    <a:masterClrMapping/>
+  </p:clrMapOvr>
+</p:sld>
+</file>
+
+<file path=ppt/slides/slide40.xml><?xml version="1.0" encoding="utf-8"?>
+<p:sld xmlns:a="http://schemas.openxmlformats.org/drawingml/2006/main" xmlns:p="http://schemas.openxmlformats.org/presentationml/2006/main" xmlns:r="http://schemas.openxmlformats.org/officeDocument/2006/relationships">
+  <p:cSld>
+    <p:spTree>
+      <p:nvGrpSpPr>
+        <p:cNvPr id="1" name=""/>
+        <p:cNvGrpSpPr/>
+        <p:nvPr/>
+      </p:nvGrpSpPr>
+      <p:grpSpPr/>
+      <p:sp>
+        <p:nvSpPr>
+          <p:cNvPr id="2" name="TextBox 1"/>
+          <p:cNvSpPr txBox="1"/>
+          <p:nvPr/>
+        </p:nvSpPr>
+        <p:spPr>
+          <a:xfrm>
+            <a:off x="548640" y="2743200"/>
+            <a:ext cx="11064240" cy="1371600"/>
+          </a:xfrm>
+          <a:prstGeom prst="rect">
+            <a:avLst/>
+          </a:prstGeom>
+          <a:noFill/>
+        </p:spPr>
+        <p:txBody>
+          <a:bodyPr wrap="square">
+            <a:noAutofit/>
+          </a:bodyPr>
+          <a:lstStyle/>
+          <a:p>
+            <a:pPr algn="ctr">
+              <a:lnSpc>
+                <a:spcPts val="2200"/>
+              </a:lnSpc>
+              <a:defRPr sz="3600" b="1">
+                <a:solidFill>
+                  <a:srgbClr val="1A1A2E"/>
+                </a:solidFill>
+                <a:latin typeface="Calibri"/>
+              </a:defRPr>
+            </a:pPr>
+            <a:r>
+              <a:t>Practice &amp; assessment</a:t>
+            </a:r>
+          </a:p>
+        </p:txBody>
+      </p:sp>
+      <p:sp>
+        <p:nvSpPr>
+          <p:cNvPr id="3" name="TextBox 2"/>
+          <p:cNvSpPr txBox="1"/>
+          <p:nvPr/>
+        </p:nvSpPr>
+        <p:spPr>
+          <a:xfrm>
+            <a:off x="548640" y="6355080"/>
+            <a:ext cx="11064240" cy="320040"/>
+          </a:xfrm>
+          <a:prstGeom prst="rect">
+            <a:avLst/>
+          </a:prstGeom>
+          <a:noFill/>
+        </p:spPr>
+        <p:txBody>
+          <a:bodyPr wrap="square">
+            <a:noAutofit/>
+          </a:bodyPr>
+          <a:lstStyle/>
+          <a:p>
+            <a:pPr algn="r">
+              <a:lnSpc>
+                <a:spcPts val="2200"/>
+              </a:lnSpc>
+              <a:defRPr sz="1000" b="0">
+                <a:solidFill>
+                  <a:srgbClr val="666666"/>
+                </a:solidFill>
+                <a:latin typeface="Calibri"/>
+              </a:defRPr>
+            </a:pPr>
+            <a:r>
+              <a:t>learn_uart_spi_i2c / Module 7</a:t>
+            </a:r>
+          </a:p>
+        </p:txBody>
+      </p:sp>
+    </p:spTree>
+  </p:cSld>
+  <p:clrMapOvr>
+    <a:masterClrMapping/>
+  </p:clrMapOvr>
+</p:sld>
+</file>
+
+<file path=ppt/slides/slide41.xml><?xml version="1.0" encoding="utf-8"?>
+<p:sld xmlns:a="http://schemas.openxmlformats.org/drawingml/2006/main" xmlns:p="http://schemas.openxmlformats.org/presentationml/2006/main" xmlns:r="http://schemas.openxmlformats.org/officeDocument/2006/relationships">
+  <p:cSld>
+    <p:spTree>
+      <p:nvGrpSpPr>
+        <p:cNvPr id="1" name=""/>
+        <p:cNvGrpSpPr/>
+        <p:nvPr/>
+      </p:nvGrpSpPr>
+      <p:grpSpPr/>
+      <p:sp>
+        <p:nvSpPr>
+          <p:cNvPr id="2" name="TextBox 1"/>
+          <p:cNvSpPr txBox="1"/>
+          <p:nvPr/>
+        </p:nvSpPr>
+        <p:spPr>
+          <a:xfrm>
+            <a:off x="548640" y="411480"/>
+            <a:ext cx="11064240" cy="777240"/>
+          </a:xfrm>
+          <a:prstGeom prst="rect">
+            <a:avLst/>
+          </a:prstGeom>
+          <a:noFill/>
+        </p:spPr>
+        <p:txBody>
+          <a:bodyPr wrap="square">
+            <a:noAutofit/>
+          </a:bodyPr>
+          <a:lstStyle/>
+          <a:p>
+            <a:pPr>
+              <a:lnSpc>
+                <a:spcPts val="2200"/>
+              </a:lnSpc>
+              <a:defRPr sz="2800" b="1">
+                <a:solidFill>
+                  <a:srgbClr val="1A1A2E"/>
+                </a:solidFill>
+                <a:latin typeface="Calibri"/>
+              </a:defRPr>
+            </a:pPr>
+            <a:r>
+              <a:t>Exercises</a:t>
+            </a:r>
+          </a:p>
+        </p:txBody>
+      </p:sp>
+      <p:sp>
+        <p:nvSpPr>
+          <p:cNvPr id="3" name="TextBox 2"/>
+          <p:cNvSpPr txBox="1"/>
+          <p:nvPr/>
+        </p:nvSpPr>
+        <p:spPr>
+          <a:xfrm>
+            <a:off x="548640" y="1234440"/>
+            <a:ext cx="11064240" cy="4937760"/>
+          </a:xfrm>
+          <a:prstGeom prst="rect">
+            <a:avLst/>
+          </a:prstGeom>
+          <a:noFill/>
+        </p:spPr>
+        <p:txBody>
+          <a:bodyPr wrap="square">
+            <a:noAutofit/>
+          </a:bodyPr>
+          <a:lstStyle/>
+          <a:p>
+            <a:pPr>
+              <a:lnSpc>
+                <a:spcPts val="2200"/>
+              </a:lnSpc>
+              <a:spcAft>
+                <a:spcPts val="1000"/>
+              </a:spcAft>
+              <a:defRPr sz="2000" b="0">
+                <a:solidFill>
+                  <a:srgbClr val="333333"/>
+                </a:solidFill>
+                <a:latin typeface="Calibri"/>
+              </a:defRPr>
+            </a:pPr>
+            <a:r>
+              <a:t>• Run i2c_baseline</a:t>
+            </a:r>
+          </a:p>
+          <a:p>
+            <a:pPr>
+              <a:lnSpc>
+                <a:spcPts val="2200"/>
+              </a:lnSpc>
+              <a:spcAft>
+                <a:spcPts val="1000"/>
+              </a:spcAft>
+              <a:defRPr sz="2000" b="0">
+                <a:solidFill>
+                  <a:srgbClr val="333333"/>
+                </a:solidFill>
+                <a:latin typeface="Calibri"/>
+              </a:defRPr>
+            </a:pPr>
+            <a:r>
+              <a:t>• Trace one transfer</a:t>
+            </a:r>
+          </a:p>
+          <a:p>
+            <a:pPr>
+              <a:lnSpc>
+                <a:spcPts val="2200"/>
+              </a:lnSpc>
+              <a:spcAft>
+                <a:spcPts val="1000"/>
+              </a:spcAft>
+              <a:defRPr sz="2000" b="0">
+                <a:solidFill>
+                  <a:srgbClr val="333333"/>
+                </a:solidFill>
+                <a:latin typeface="Calibri"/>
+              </a:defRPr>
+            </a:pPr>
+            <a:r>
+              <a:t>• Bus monitor</a:t>
+            </a:r>
+          </a:p>
+          <a:p>
+            <a:pPr>
+              <a:lnSpc>
+                <a:spcPts val="2200"/>
+              </a:lnSpc>
+              <a:spcAft>
+                <a:spcPts val="1000"/>
+              </a:spcAft>
+              <a:defRPr sz="2000" b="0">
+                <a:solidFill>
+                  <a:srgbClr val="333333"/>
+                </a:solidFill>
+                <a:latin typeface="Calibri"/>
+              </a:defRPr>
+            </a:pPr>
+            <a:r>
+              <a:t>• Optional: Waveforms</a:t>
+            </a:r>
+          </a:p>
+        </p:txBody>
+      </p:sp>
+      <p:sp>
+        <p:nvSpPr>
+          <p:cNvPr id="4" name="TextBox 3"/>
+          <p:cNvSpPr txBox="1"/>
+          <p:nvPr/>
+        </p:nvSpPr>
+        <p:spPr>
+          <a:xfrm>
+            <a:off x="548640" y="6355080"/>
+            <a:ext cx="11064240" cy="320040"/>
+          </a:xfrm>
+          <a:prstGeom prst="rect">
+            <a:avLst/>
+          </a:prstGeom>
+          <a:noFill/>
+        </p:spPr>
+        <p:txBody>
+          <a:bodyPr wrap="square">
+            <a:noAutofit/>
+          </a:bodyPr>
+          <a:lstStyle/>
+          <a:p>
+            <a:pPr algn="r">
+              <a:lnSpc>
+                <a:spcPts val="2200"/>
+              </a:lnSpc>
+              <a:defRPr sz="1000" b="0">
+                <a:solidFill>
+                  <a:srgbClr val="666666"/>
+                </a:solidFill>
+                <a:latin typeface="Calibri"/>
+              </a:defRPr>
+            </a:pPr>
+            <a:r>
+              <a:t>learn_uart_spi_i2c / Module 7</a:t>
+            </a:r>
+          </a:p>
+        </p:txBody>
+      </p:sp>
+    </p:spTree>
+  </p:cSld>
+  <p:clrMapOvr>
+    <a:masterClrMapping/>
+  </p:clrMapOvr>
+</p:sld>
+</file>
+
+<file path=ppt/slides/slide42.xml><?xml version="1.0" encoding="utf-8"?>
+<p:sld xmlns:a="http://schemas.openxmlformats.org/drawingml/2006/main" xmlns:p="http://schemas.openxmlformats.org/presentationml/2006/main" xmlns:r="http://schemas.openxmlformats.org/officeDocument/2006/relationships">
+  <p:cSld>
+    <p:spTree>
+      <p:nvGrpSpPr>
+        <p:cNvPr id="1" name=""/>
+        <p:cNvGrpSpPr/>
+        <p:nvPr/>
+      </p:nvGrpSpPr>
+      <p:grpSpPr/>
+      <p:sp>
+        <p:nvSpPr>
+          <p:cNvPr id="2" name="TextBox 1"/>
+          <p:cNvSpPr txBox="1"/>
+          <p:nvPr/>
+        </p:nvSpPr>
+        <p:spPr>
+          <a:xfrm>
+            <a:off x="548640" y="411480"/>
+            <a:ext cx="11064240" cy="777240"/>
+          </a:xfrm>
+          <a:prstGeom prst="rect">
+            <a:avLst/>
+          </a:prstGeom>
+          <a:noFill/>
+        </p:spPr>
+        <p:txBody>
+          <a:bodyPr wrap="square">
+            <a:noAutofit/>
+          </a:bodyPr>
+          <a:lstStyle/>
+          <a:p>
+            <a:pPr>
+              <a:lnSpc>
+                <a:spcPts val="2200"/>
+              </a:lnSpc>
+              <a:defRPr sz="2800" b="1">
+                <a:solidFill>
+                  <a:srgbClr val="1A1A2E"/>
+                </a:solidFill>
+                <a:latin typeface="Calibri"/>
+              </a:defRPr>
+            </a:pPr>
+            <a:r>
+              <a:t>Assessment checklist</a:t>
+            </a:r>
+          </a:p>
+        </p:txBody>
+      </p:sp>
+      <p:sp>
+        <p:nvSpPr>
+          <p:cNvPr id="3" name="TextBox 2"/>
+          <p:cNvSpPr txBox="1"/>
+          <p:nvPr/>
+        </p:nvSpPr>
+        <p:spPr>
+          <a:xfrm>
+            <a:off x="548640" y="1234440"/>
+            <a:ext cx="11064240" cy="4937760"/>
+          </a:xfrm>
+          <a:prstGeom prst="rect">
+            <a:avLst/>
+          </a:prstGeom>
+          <a:noFill/>
+        </p:spPr>
+        <p:txBody>
+          <a:bodyPr wrap="square">
+            <a:noAutofit/>
+          </a:bodyPr>
+          <a:lstStyle/>
+          <a:p>
+            <a:pPr>
+              <a:lnSpc>
+                <a:spcPts val="2200"/>
+              </a:lnSpc>
+              <a:spcAft>
+                <a:spcPts val="1000"/>
+              </a:spcAft>
+              <a:defRPr sz="2000" b="0">
+                <a:solidFill>
+                  <a:srgbClr val="333333"/>
+                </a:solidFill>
+                <a:latin typeface="Calibri"/>
+              </a:defRPr>
+            </a:pPr>
+            <a:r>
+              <a:t>• Can describe I²C START, STOP, address+R/W, and data</a:t>
+            </a:r>
+          </a:p>
+          <a:p>
+            <a:pPr>
+              <a:lnSpc>
+                <a:spcPts val="2200"/>
+              </a:lnSpc>
+              <a:spcAft>
+                <a:spcPts val="1000"/>
+              </a:spcAft>
+              <a:defRPr sz="2000" b="0">
+                <a:solidFill>
+                  <a:srgbClr val="333333"/>
+                </a:solidFill>
+                <a:latin typeface="Calibri"/>
+              </a:defRPr>
+            </a:pPr>
+            <a:r>
+              <a:t>      phase (and ACK/NACK concept).</a:t>
+            </a:r>
+          </a:p>
+          <a:p>
+            <a:pPr>
+              <a:lnSpc>
+                <a:spcPts val="2200"/>
+              </a:lnSpc>
+              <a:spcAft>
+                <a:spcPts val="1000"/>
+              </a:spcAft>
+              <a:defRPr sz="2000" b="0">
+                <a:solidFill>
+                  <a:srgbClr val="333333"/>
+                </a:solidFill>
+                <a:latin typeface="Calibri"/>
+              </a:defRPr>
+            </a:pPr>
+            <a:r>
+              <a:t>• Can explain the role of i2c_master and clk_div; know</a:t>
+            </a:r>
+          </a:p>
+          <a:p>
+            <a:pPr>
+              <a:lnSpc>
+                <a:spcPts val="2200"/>
+              </a:lnSpc>
+              <a:spcAft>
+                <a:spcPts val="1000"/>
+              </a:spcAft>
+              <a:defRPr sz="2000" b="0">
+                <a:solidFill>
+                  <a:srgbClr val="333333"/>
+                </a:solidFill>
+                <a:latin typeface="Calibri"/>
+              </a:defRPr>
+            </a:pPr>
+            <a:r>
+              <a:t>      the baseline uses push-pull (simplified).</a:t>
+            </a:r>
+          </a:p>
+          <a:p>
+            <a:pPr>
+              <a:lnSpc>
+                <a:spcPts val="2200"/>
+              </a:lnSpc>
+              <a:spcAft>
+                <a:spcPts val="1000"/>
+              </a:spcAft>
+              <a:defRPr sz="2000" b="0">
+                <a:solidFill>
+                  <a:srgbClr val="333333"/>
+                </a:solidFill>
+                <a:latin typeface="Calibri"/>
+              </a:defRPr>
+            </a:pPr>
+            <a:r>
+              <a:t>• Can run i2c_baseline and interpret the test result.</a:t>
+            </a:r>
+          </a:p>
+          <a:p>
+            <a:pPr>
+              <a:lnSpc>
+                <a:spcPts val="2200"/>
+              </a:lnSpc>
+              <a:spcAft>
+                <a:spcPts val="1000"/>
+              </a:spcAft>
+              <a:defRPr sz="2000" b="0">
+                <a:solidFill>
+                  <a:srgbClr val="333333"/>
+                </a:solidFill>
+                <a:latin typeface="Calibri"/>
+              </a:defRPr>
+            </a:pPr>
+            <a:r>
+              <a:t>• Ready for Module 8: I²C UVM+SV verification.</a:t>
+            </a:r>
+          </a:p>
+        </p:txBody>
+      </p:sp>
+      <p:sp>
+        <p:nvSpPr>
+          <p:cNvPr id="4" name="TextBox 3"/>
+          <p:cNvSpPr txBox="1"/>
+          <p:nvPr/>
+        </p:nvSpPr>
+        <p:spPr>
+          <a:xfrm>
+            <a:off x="548640" y="6355080"/>
+            <a:ext cx="11064240" cy="320040"/>
+          </a:xfrm>
+          <a:prstGeom prst="rect">
+            <a:avLst/>
+          </a:prstGeom>
+          <a:noFill/>
+        </p:spPr>
+        <p:txBody>
+          <a:bodyPr wrap="square">
+            <a:noAutofit/>
+          </a:bodyPr>
+          <a:lstStyle/>
+          <a:p>
+            <a:pPr algn="r">
+              <a:lnSpc>
+                <a:spcPts val="2200"/>
+              </a:lnSpc>
+              <a:defRPr sz="1000" b="0">
+                <a:solidFill>
+                  <a:srgbClr val="666666"/>
+                </a:solidFill>
+                <a:latin typeface="Calibri"/>
+              </a:defRPr>
+            </a:pPr>
+            <a:r>
+              <a:t>learn_uart_spi_i2c / Module 7</a:t>
+            </a:r>
+          </a:p>
+        </p:txBody>
+      </p:sp>
+    </p:spTree>
+  </p:cSld>
+  <p:clrMapOvr>
+    <a:masterClrMapping/>
+  </p:clrMapOvr>
+</p:sld>
+</file>
+
+<file path=ppt/slides/slide43.xml><?xml version="1.0" encoding="utf-8"?>
+<p:sld xmlns:a="http://schemas.openxmlformats.org/drawingml/2006/main" xmlns:p="http://schemas.openxmlformats.org/presentationml/2006/main" xmlns:r="http://schemas.openxmlformats.org/officeDocument/2006/relationships">
+  <p:cSld>
+    <p:spTree>
+      <p:nvGrpSpPr>
+        <p:cNvPr id="1" name=""/>
+        <p:cNvGrpSpPr/>
+        <p:nvPr/>
+      </p:nvGrpSpPr>
+      <p:grpSpPr/>
+      <p:sp>
+        <p:nvSpPr>
+          <p:cNvPr id="2" name="TextBox 1"/>
+          <p:cNvSpPr txBox="1"/>
+          <p:nvPr/>
+        </p:nvSpPr>
+        <p:spPr>
+          <a:xfrm>
+            <a:off x="548640" y="411480"/>
+            <a:ext cx="11064240" cy="777240"/>
+          </a:xfrm>
+          <a:prstGeom prst="rect">
+            <a:avLst/>
+          </a:prstGeom>
+          <a:noFill/>
+        </p:spPr>
+        <p:txBody>
+          <a:bodyPr wrap="square">
+            <a:noAutofit/>
+          </a:bodyPr>
+          <a:lstStyle/>
+          <a:p>
+            <a:pPr>
+              <a:lnSpc>
+                <a:spcPts val="2200"/>
+              </a:lnSpc>
+              <a:defRPr sz="2800" b="1">
+                <a:solidFill>
+                  <a:srgbClr val="1A1A2E"/>
+                </a:solidFill>
+                <a:latin typeface="Calibri"/>
+              </a:defRPr>
+            </a:pPr>
+            <a:r>
+              <a:t>Summary &amp; next steps</a:t>
+            </a:r>
+          </a:p>
+        </p:txBody>
+      </p:sp>
+      <p:sp>
+        <p:nvSpPr>
+          <p:cNvPr id="3" name="TextBox 2"/>
+          <p:cNvSpPr txBox="1"/>
+          <p:nvPr/>
+        </p:nvSpPr>
+        <p:spPr>
+          <a:xfrm>
+            <a:off x="548640" y="1234440"/>
+            <a:ext cx="11064240" cy="4937760"/>
+          </a:xfrm>
+          <a:prstGeom prst="rect">
+            <a:avLst/>
+          </a:prstGeom>
+          <a:noFill/>
+        </p:spPr>
+        <p:txBody>
+          <a:bodyPr wrap="square">
+            <a:noAutofit/>
+          </a:bodyPr>
+          <a:lstStyle/>
+          <a:p>
+            <a:pPr>
+              <a:lnSpc>
+                <a:spcPts val="2200"/>
+              </a:lnSpc>
+              <a:spcAft>
+                <a:spcPts val="1000"/>
+              </a:spcAft>
+              <a:defRPr sz="2000" b="0">
+                <a:solidFill>
+                  <a:srgbClr val="333333"/>
+                </a:solidFill>
+                <a:latin typeface="Calibri"/>
+              </a:defRPr>
+            </a:pPr>
+            <a:r>
+              <a:t>• Understand the I²C protocol (start/stop, addressing,</a:t>
+            </a:r>
+          </a:p>
+          <a:p>
+            <a:pPr>
+              <a:lnSpc>
+                <a:spcPts val="2200"/>
+              </a:lnSpc>
+              <a:spcAft>
+                <a:spcPts val="1000"/>
+              </a:spcAft>
+              <a:defRPr sz="2000" b="0">
+                <a:solidFill>
+                  <a:srgbClr val="333333"/>
+                </a:solidFill>
+                <a:latin typeface="Calibri"/>
+              </a:defRPr>
+            </a:pPr>
+            <a:r>
+              <a:t>      ACK/NACK), translate it to RTL (simple master…</a:t>
+            </a:r>
+          </a:p>
+          <a:p>
+            <a:pPr>
+              <a:lnSpc>
+                <a:spcPts val="2200"/>
+              </a:lnSpc>
+              <a:spcAft>
+                <a:spcPts val="1000"/>
+              </a:spcAft>
+              <a:defRPr sz="2000" b="0">
+                <a:solidFill>
+                  <a:srgbClr val="333333"/>
+                </a:solidFill>
+                <a:latin typeface="Calibri"/>
+              </a:defRPr>
+            </a:pPr>
+            <a:r>
+              <a:t>• Complete module7/CHECKLIST.md</a:t>
+            </a:r>
+          </a:p>
+          <a:p>
+            <a:pPr>
+              <a:lnSpc>
+                <a:spcPts val="2200"/>
+              </a:lnSpc>
+              <a:spcAft>
+                <a:spcPts val="1000"/>
+              </a:spcAft>
+              <a:defRPr sz="2000" b="0">
+                <a:solidFill>
+                  <a:srgbClr val="333333"/>
+                </a:solidFill>
+                <a:latin typeface="Calibri"/>
+              </a:defRPr>
+            </a:pPr>
+            <a:r>
+              <a:t>• Review module7/EXAMPLES.md and run each lab</a:t>
+            </a:r>
+          </a:p>
+          <a:p>
+            <a:pPr>
+              <a:lnSpc>
+                <a:spcPts val="2200"/>
+              </a:lnSpc>
+              <a:spcAft>
+                <a:spcPts val="1000"/>
+              </a:spcAft>
+              <a:defRPr sz="2000" b="0">
+                <a:solidFill>
+                  <a:srgbClr val="333333"/>
+                </a:solidFill>
+                <a:latin typeface="Calibri"/>
+              </a:defRPr>
+            </a:pPr>
+            <a:r>
+              <a:t>• Next: I²C UVM+SV</a:t>
+            </a:r>
+          </a:p>
+        </p:txBody>
+      </p:sp>
+      <p:sp>
+        <p:nvSpPr>
+          <p:cNvPr id="4" name="TextBox 3"/>
           <p:cNvSpPr txBox="1"/>
           <p:nvPr/>
         </p:nvSpPr>
@@ -8940,14 +13200,94 @@
               </a:defRPr>
             </a:pPr>
             <a:r>
-              <a:t>RTL / block architecture</a:t>
+              <a:t>1. Block hierarchy</a:t>
+            </a:r>
+          </a:p>
+        </p:txBody>
+      </p:sp>
+      <p:sp>
+        <p:nvSpPr>
+          <p:cNvPr id="3" name="TextBox 2"/>
+          <p:cNvSpPr txBox="1"/>
+          <p:nvPr/>
+        </p:nvSpPr>
+        <p:spPr>
+          <a:xfrm>
+            <a:off x="548640" y="1234440"/>
+            <a:ext cx="5303520" cy="4754880"/>
+          </a:xfrm>
+          <a:prstGeom prst="rect">
+            <a:avLst/>
+          </a:prstGeom>
+          <a:noFill/>
+        </p:spPr>
+        <p:txBody>
+          <a:bodyPr wrap="square">
+            <a:noAutofit/>
+          </a:bodyPr>
+          <a:lstStyle/>
+          <a:p>
+            <a:pPr>
+              <a:lnSpc>
+                <a:spcPts val="2200"/>
+              </a:lnSpc>
+              <a:spcAft>
+                <a:spcPts val="1000"/>
+              </a:spcAft>
+              <a:defRPr sz="2000" b="0">
+                <a:solidFill>
+                  <a:srgbClr val="333333"/>
+                </a:solidFill>
+                <a:latin typeface="Calibri"/>
+              </a:defRPr>
+            </a:pPr>
+            <a:r>
+              <a:t>• top_i2c_baseline → `clk_div` +</a:t>
+            </a:r>
+          </a:p>
+          <a:p>
+            <a:pPr>
+              <a:lnSpc>
+                <a:spcPts val="2200"/>
+              </a:lnSpc>
+              <a:spcAft>
+                <a:spcPts val="1000"/>
+              </a:spcAft>
+              <a:defRPr sz="2000" b="0">
+                <a:solidFill>
+                  <a:srgbClr val="333333"/>
+                </a:solidFill>
+                <a:latin typeface="Calibri"/>
+              </a:defRPr>
+            </a:pPr>
+            <a:r>
+              <a:t>      `i2c_master`; C++ drives</a:t>
+            </a:r>
+          </a:p>
+          <a:p>
+            <a:pPr>
+              <a:lnSpc>
+                <a:spcPts val="2200"/>
+              </a:lnSpc>
+              <a:spcAft>
+                <a:spcPts val="1000"/>
+              </a:spcAft>
+              <a:defRPr sz="2000" b="0">
+                <a:solidFill>
+                  <a:srgbClr val="333333"/>
+                </a:solidFill>
+                <a:latin typeface="Calibri"/>
+              </a:defRPr>
+            </a:pPr>
+            <a:r>
+              <a:t>      `clk`/`rst_n`.</a:t>
             </a:r>
           </a:p>
         </p:txBody>
       </p:sp>
       <p:pic>
         <p:nvPicPr>
-          <p:cNvPr id="3" name="Picture 2" descr="rtl_architecture.png"/>
+          <p:cNvPr id="4" name="Picture 3" descr="rtl_architecture.png"/>
           <p:cNvPicPr>
             <a:picLocks noChangeAspect="1"/>
           </p:cNvPicPr>
@@ -8961,53 +13301,14 @@
         </p:blipFill>
         <p:spPr>
           <a:xfrm>
-            <a:off x="548640" y="1143000"/>
-            <a:ext cx="8128000" cy="4572000"/>
+            <a:off x="6172200" y="2094547"/>
+            <a:ext cx="5394960" cy="3034665"/>
           </a:xfrm>
           <a:prstGeom prst="rect">
             <a:avLst/>
           </a:prstGeom>
         </p:spPr>
       </p:pic>
-      <p:sp>
-        <p:nvSpPr>
-          <p:cNvPr id="4" name="TextBox 3"/>
-          <p:cNvSpPr txBox="1"/>
-          <p:nvPr/>
-        </p:nvSpPr>
-        <p:spPr>
-          <a:xfrm>
-            <a:off x="548640" y="5897880"/>
-            <a:ext cx="11064240" cy="411480"/>
-          </a:xfrm>
-          <a:prstGeom prst="rect">
-            <a:avLst/>
-          </a:prstGeom>
-          <a:noFill/>
-        </p:spPr>
-        <p:txBody>
-          <a:bodyPr wrap="square">
-            <a:noAutofit/>
-          </a:bodyPr>
-          <a:lstStyle/>
-          <a:p>
-            <a:pPr>
-              <a:lnSpc>
-                <a:spcPts val="2200"/>
-              </a:lnSpc>
-              <a:defRPr sz="1200" b="0">
-                <a:solidFill>
-                  <a:srgbClr val="333333"/>
-                </a:solidFill>
-                <a:latin typeface="Calibri"/>
-              </a:defRPr>
-            </a:pPr>
-            <a:r>
-              <a:t>Module 7: DUT / block hierarchy (see module7/examples/).</a:t>
-            </a:r>
-          </a:p>
-        </p:txBody>
-      </p:sp>
       <p:sp>
         <p:nvSpPr>
           <p:cNvPr id="5" name="TextBox 4"/>
